--- a/marketing/decks/phase-06-model-evaluation.pptx
+++ b/marketing/decks/phase-06-model-evaluation.pptx
@@ -2,38 +2,38 @@
 <file path=ppt/presentation.xml><?xml version="1.0" encoding="utf-8"?>
 <p:presentation xmlns:p="http://schemas.openxmlformats.org/presentationml/2006/main">
   <p:sldMasterIdLst>
-    <p:sldMasterId xmlns:r="http://schemas.openxmlformats.org/officeDocument/2006/relationships" id="2147483648" r:id="Rebb636a0bb44485c"/>
+    <p:sldMasterId xmlns:r="http://schemas.openxmlformats.org/officeDocument/2006/relationships" id="2147483648" r:id="R32a830444fc444fb"/>
   </p:sldMasterIdLst>
   <p:notesMasterIdLst>
-    <p:notesMasterId xmlns:r="http://schemas.openxmlformats.org/officeDocument/2006/relationships" r:id="R3b686d0707ee4c75"/>
+    <p:notesMasterId xmlns:r="http://schemas.openxmlformats.org/officeDocument/2006/relationships" r:id="Ra5e98f3a3db2407c"/>
   </p:notesMasterIdLst>
   <p:sldIdLst>
-    <p:sldId xmlns:r="http://schemas.openxmlformats.org/officeDocument/2006/relationships" id="256" r:id="R89e131a788a74f14"/>
-    <p:sldId xmlns:r="http://schemas.openxmlformats.org/officeDocument/2006/relationships" id="257" r:id="R0154fb4d598c4292"/>
-    <p:sldId xmlns:r="http://schemas.openxmlformats.org/officeDocument/2006/relationships" id="258" r:id="Rb1eb45f356fd40b8"/>
-    <p:sldId xmlns:r="http://schemas.openxmlformats.org/officeDocument/2006/relationships" id="259" r:id="R8cdf7acb63d74d14"/>
-    <p:sldId xmlns:r="http://schemas.openxmlformats.org/officeDocument/2006/relationships" id="260" r:id="R3ddd628da296422f"/>
-    <p:sldId xmlns:r="http://schemas.openxmlformats.org/officeDocument/2006/relationships" id="261" r:id="R7c69609004484e7c"/>
-    <p:sldId xmlns:r="http://schemas.openxmlformats.org/officeDocument/2006/relationships" id="262" r:id="Rce7db9d5ff9f4952"/>
-    <p:sldId xmlns:r="http://schemas.openxmlformats.org/officeDocument/2006/relationships" id="263" r:id="R52c96d67ce8145b8"/>
-    <p:sldId xmlns:r="http://schemas.openxmlformats.org/officeDocument/2006/relationships" id="264" r:id="Re4e014aa470d4ca0"/>
-    <p:sldId xmlns:r="http://schemas.openxmlformats.org/officeDocument/2006/relationships" id="265" r:id="R2057d4dddfe147e1"/>
-    <p:sldId xmlns:r="http://schemas.openxmlformats.org/officeDocument/2006/relationships" id="266" r:id="R36123fde255143f9"/>
-    <p:sldId xmlns:r="http://schemas.openxmlformats.org/officeDocument/2006/relationships" id="267" r:id="R586cd91cb70b4bd3"/>
-    <p:sldId xmlns:r="http://schemas.openxmlformats.org/officeDocument/2006/relationships" id="268" r:id="Rafaf586855b543b3"/>
-    <p:sldId xmlns:r="http://schemas.openxmlformats.org/officeDocument/2006/relationships" id="269" r:id="R74b6a9adf7d24bd3"/>
-    <p:sldId xmlns:r="http://schemas.openxmlformats.org/officeDocument/2006/relationships" id="270" r:id="Rd8e987461c4c4df8"/>
-    <p:sldId xmlns:r="http://schemas.openxmlformats.org/officeDocument/2006/relationships" id="271" r:id="Rfa0438ebd4274c06"/>
-    <p:sldId xmlns:r="http://schemas.openxmlformats.org/officeDocument/2006/relationships" id="272" r:id="R46b2880687244414"/>
-    <p:sldId xmlns:r="http://schemas.openxmlformats.org/officeDocument/2006/relationships" id="273" r:id="R62cc7df526324674"/>
-    <p:sldId xmlns:r="http://schemas.openxmlformats.org/officeDocument/2006/relationships" id="274" r:id="R879df8d23a444b49"/>
-    <p:sldId xmlns:r="http://schemas.openxmlformats.org/officeDocument/2006/relationships" id="275" r:id="R8c57b863efbb4646"/>
-    <p:sldId xmlns:r="http://schemas.openxmlformats.org/officeDocument/2006/relationships" id="276" r:id="Raca23f6b4ff34e85"/>
-    <p:sldId xmlns:r="http://schemas.openxmlformats.org/officeDocument/2006/relationships" id="277" r:id="R5f3e061c855a42f2"/>
-    <p:sldId xmlns:r="http://schemas.openxmlformats.org/officeDocument/2006/relationships" id="278" r:id="R67ab4e7f97924c3f"/>
-    <p:sldId xmlns:r="http://schemas.openxmlformats.org/officeDocument/2006/relationships" id="279" r:id="R0db345f669854067"/>
-    <p:sldId xmlns:r="http://schemas.openxmlformats.org/officeDocument/2006/relationships" id="280" r:id="R4215f53ef677491f"/>
-    <p:sldId xmlns:r="http://schemas.openxmlformats.org/officeDocument/2006/relationships" id="281" r:id="R20e602246d3b42e9"/>
+    <p:sldId xmlns:r="http://schemas.openxmlformats.org/officeDocument/2006/relationships" id="256" r:id="R2737ea58e7484c80"/>
+    <p:sldId xmlns:r="http://schemas.openxmlformats.org/officeDocument/2006/relationships" id="257" r:id="R6089fc4227e24e58"/>
+    <p:sldId xmlns:r="http://schemas.openxmlformats.org/officeDocument/2006/relationships" id="258" r:id="Rc666079aa0604e26"/>
+    <p:sldId xmlns:r="http://schemas.openxmlformats.org/officeDocument/2006/relationships" id="259" r:id="R70dccdee901b4588"/>
+    <p:sldId xmlns:r="http://schemas.openxmlformats.org/officeDocument/2006/relationships" id="260" r:id="Rc274c0231a8f4523"/>
+    <p:sldId xmlns:r="http://schemas.openxmlformats.org/officeDocument/2006/relationships" id="261" r:id="R57c6e0694d674e66"/>
+    <p:sldId xmlns:r="http://schemas.openxmlformats.org/officeDocument/2006/relationships" id="262" r:id="R1bca1403e1d74253"/>
+    <p:sldId xmlns:r="http://schemas.openxmlformats.org/officeDocument/2006/relationships" id="263" r:id="R448417b0227a44c5"/>
+    <p:sldId xmlns:r="http://schemas.openxmlformats.org/officeDocument/2006/relationships" id="264" r:id="R43fe7ea112c348bd"/>
+    <p:sldId xmlns:r="http://schemas.openxmlformats.org/officeDocument/2006/relationships" id="265" r:id="Rba86d588fcc446b5"/>
+    <p:sldId xmlns:r="http://schemas.openxmlformats.org/officeDocument/2006/relationships" id="266" r:id="R6f6c4e8704ea4e95"/>
+    <p:sldId xmlns:r="http://schemas.openxmlformats.org/officeDocument/2006/relationships" id="267" r:id="R8345e7a91f924909"/>
+    <p:sldId xmlns:r="http://schemas.openxmlformats.org/officeDocument/2006/relationships" id="268" r:id="Rc1fe9898ebf3474b"/>
+    <p:sldId xmlns:r="http://schemas.openxmlformats.org/officeDocument/2006/relationships" id="269" r:id="R723ce99cce7c4991"/>
+    <p:sldId xmlns:r="http://schemas.openxmlformats.org/officeDocument/2006/relationships" id="270" r:id="R02e1df68438c4f48"/>
+    <p:sldId xmlns:r="http://schemas.openxmlformats.org/officeDocument/2006/relationships" id="271" r:id="R25d2565296314290"/>
+    <p:sldId xmlns:r="http://schemas.openxmlformats.org/officeDocument/2006/relationships" id="272" r:id="R6ab1a5de3e5f4de8"/>
+    <p:sldId xmlns:r="http://schemas.openxmlformats.org/officeDocument/2006/relationships" id="273" r:id="Rd51f9c619e644dd2"/>
+    <p:sldId xmlns:r="http://schemas.openxmlformats.org/officeDocument/2006/relationships" id="274" r:id="R59e3256bcb4148b5"/>
+    <p:sldId xmlns:r="http://schemas.openxmlformats.org/officeDocument/2006/relationships" id="275" r:id="Rabb86ae36e4541e1"/>
+    <p:sldId xmlns:r="http://schemas.openxmlformats.org/officeDocument/2006/relationships" id="276" r:id="R3fb344cfc1024c12"/>
+    <p:sldId xmlns:r="http://schemas.openxmlformats.org/officeDocument/2006/relationships" id="277" r:id="Rf34c4097463c4241"/>
+    <p:sldId xmlns:r="http://schemas.openxmlformats.org/officeDocument/2006/relationships" id="278" r:id="Raa39698d14804f00"/>
+    <p:sldId xmlns:r="http://schemas.openxmlformats.org/officeDocument/2006/relationships" id="279" r:id="R3e9bc3994cc542c2"/>
+    <p:sldId xmlns:r="http://schemas.openxmlformats.org/officeDocument/2006/relationships" id="280" r:id="Ra436821a9f1b4e56"/>
+    <p:sldId xmlns:r="http://schemas.openxmlformats.org/officeDocument/2006/relationships" id="281" r:id="Re99491d133ca4086"/>
   </p:sldIdLst>
   <p:sldSz cx="12192000" cy="6858000"/>
   <p:notesSz cx="6858000" cy="9144000"/>
@@ -2445,7 +2445,7 @@
   </p:cSld>
   <p:clrMap bg1="lt1" tx1="dk1" bg2="lt2" tx2="dk2" accent1="accent1" accent2="accent2" accent3="accent3" accent4="accent4" accent5="accent5" accent6="accent6" hlink="hlink" folHlink="folHlink"/>
   <p:sldLayoutIdLst>
-    <p:sldLayoutId xmlns:r="http://schemas.openxmlformats.org/officeDocument/2006/relationships" id="2147483649" r:id="R0a7e4dd6f41847fd"/>
+    <p:sldLayoutId xmlns:r="http://schemas.openxmlformats.org/officeDocument/2006/relationships" id="2147483649" r:id="R6344150097eb4362"/>
   </p:sldLayoutIdLst>
   <p:txStyles>
     <p:titleStyle>
@@ -3014,6 +3014,7 @@
           <a:lstStyle xmlns:a="http://schemas.openxmlformats.org/drawingml/2006/main"/>
           <a:p xmlns:a="http://schemas.openxmlformats.org/drawingml/2006/main">
             <a:pPr algn="l">
+              <a:buNone/>
               <a:defRPr sz="6000">
                 <a:solidFill>
                   <a:srgbClr val="000000"/>
@@ -3060,6 +3061,7 @@
           <a:lstStyle xmlns:a="http://schemas.openxmlformats.org/drawingml/2006/main"/>
           <a:p xmlns:a="http://schemas.openxmlformats.org/drawingml/2006/main">
             <a:pPr algn="l">
+              <a:buNone/>
               <a:defRPr sz="2400">
                 <a:solidFill>
                   <a:srgbClr val="000000"/>
@@ -3105,6 +3107,7 @@
           <a:lstStyle xmlns:a="http://schemas.openxmlformats.org/drawingml/2006/main"/>
           <a:p xmlns:a="http://schemas.openxmlformats.org/drawingml/2006/main">
             <a:pPr algn="l">
+              <a:buNone/>
               <a:defRPr sz="2400">
                 <a:solidFill>
                   <a:srgbClr val="000000"/>
@@ -3170,16 +3173,28 @@
           <a:lstStyle xmlns:a="http://schemas.openxmlformats.org/drawingml/2006/main"/>
           <a:p xmlns:a="http://schemas.openxmlformats.org/drawingml/2006/main">
             <a:pPr algn="r">
-              <a:defRPr sz="1000">
-                <a:solidFill>
-                  <a:srgbClr val="000000"/>
-                </a:solidFill>
-                <a:latin typeface="Helvetica Neue"/>
-                <a:ea typeface="Helvetica Neue"/>
-                <a:cs typeface="Helvetica Neue"/>
-              </a:defRPr>
-            </a:pPr>
-            <a:r>
+              <a:lnSpc>
+                <a:spcPct val="108000"/>
+              </a:lnSpc>
+              <a:buNone/>
+              <a:defRPr sz="1200" b="1">
+                <a:solidFill>
+                  <a:srgbClr val="000000"/>
+                </a:solidFill>
+                <a:latin typeface="Helvetica Neue"/>
+                <a:ea typeface="Helvetica Neue"/>
+                <a:cs typeface="Helvetica Neue"/>
+              </a:defRPr>
+            </a:pPr>
+            <a:r>
+              <a:rPr sz="1200" b="1">
+                <a:solidFill>
+                  <a:srgbClr val="000000"/>
+                </a:solidFill>
+                <a:latin typeface="Helvetica Neue"/>
+                <a:ea typeface="Helvetica Neue"/>
+                <a:cs typeface="Helvetica Neue"/>
+              </a:rPr>
               <a:t>6</a:t>
             </a:r>
           </a:p>
@@ -3215,16 +3230,28 @@
           <a:lstStyle xmlns:a="http://schemas.openxmlformats.org/drawingml/2006/main"/>
           <a:p xmlns:a="http://schemas.openxmlformats.org/drawingml/2006/main">
             <a:pPr algn="l">
-              <a:defRPr sz="2900">
-                <a:solidFill>
-                  <a:srgbClr val="000000"/>
-                </a:solidFill>
-                <a:latin typeface="Helvetica Neue"/>
-                <a:ea typeface="Helvetica Neue"/>
-                <a:cs typeface="Helvetica Neue"/>
-              </a:defRPr>
-            </a:pPr>
-            <a:r>
+              <a:lnSpc>
+                <a:spcPct val="98000"/>
+              </a:lnSpc>
+              <a:buNone/>
+              <a:defRPr sz="3075" b="1">
+                <a:solidFill>
+                  <a:srgbClr val="000000"/>
+                </a:solidFill>
+                <a:latin typeface="Helvetica Neue"/>
+                <a:ea typeface="Helvetica Neue"/>
+                <a:cs typeface="Helvetica Neue"/>
+              </a:defRPr>
+            </a:pPr>
+            <a:r>
+              <a:rPr sz="3075" b="1">
+                <a:solidFill>
+                  <a:srgbClr val="000000"/>
+                </a:solidFill>
+                <a:latin typeface="Helvetica Neue"/>
+                <a:ea typeface="Helvetica Neue"/>
+                <a:cs typeface="Helvetica Neue"/>
+              </a:rPr>
               <a:t>Quantization makes local inference practical—with tradeoffs</a:t>
             </a:r>
           </a:p>
@@ -3232,7 +3259,7 @@
       </p:sp>
       <p:cxnSp>
         <p:nvCxnSpPr>
-          <p:cNvPr id="18" name="Google-Shape-2259-p159-4"/>
+          <p:cNvPr id="27" name="Google-Shape-2259-p159-4"/>
           <p:cNvCxnSpPr/>
           <p:nvPr/>
         </p:nvCxnSpPr>
@@ -3392,31 +3419,55 @@
           <a:lstStyle xmlns:a="http://schemas.openxmlformats.org/drawingml/2006/main"/>
           <a:p xmlns:a="http://schemas.openxmlformats.org/drawingml/2006/main">
             <a:pPr algn="l">
-              <a:defRPr sz="1600">
-                <a:solidFill>
-                  <a:srgbClr val="000000"/>
-                </a:solidFill>
-                <a:latin typeface="Helvetica Neue"/>
-                <a:ea typeface="Helvetica Neue"/>
-                <a:cs typeface="Helvetica Neue"/>
-              </a:defRPr>
-            </a:pPr>
-            <a:r>
+              <a:lnSpc>
+                <a:spcPct val="114000"/>
+              </a:lnSpc>
+              <a:buNone/>
+              <a:defRPr sz="1350">
+                <a:solidFill>
+                  <a:srgbClr val="000000"/>
+                </a:solidFill>
+                <a:latin typeface="Helvetica Neue"/>
+                <a:ea typeface="Helvetica Neue"/>
+                <a:cs typeface="Helvetica Neue"/>
+              </a:defRPr>
+            </a:pPr>
+            <a:r>
+              <a:rPr sz="1350">
+                <a:solidFill>
+                  <a:srgbClr val="000000"/>
+                </a:solidFill>
+                <a:latin typeface="Helvetica Neue"/>
+                <a:ea typeface="Helvetica Neue"/>
+                <a:cs typeface="Helvetica Neue"/>
+              </a:rPr>
               <a:t>FIT</a:t>
             </a:r>
           </a:p>
           <a:p xmlns:a="http://schemas.openxmlformats.org/drawingml/2006/main">
             <a:pPr algn="l">
-              <a:defRPr sz="1600">
-                <a:solidFill>
-                  <a:srgbClr val="000000"/>
-                </a:solidFill>
-                <a:latin typeface="Helvetica Neue"/>
-                <a:ea typeface="Helvetica Neue"/>
-                <a:cs typeface="Helvetica Neue"/>
-              </a:defRPr>
-            </a:pPr>
-            <a:r>
+              <a:lnSpc>
+                <a:spcPct val="114000"/>
+              </a:lnSpc>
+              <a:buNone/>
+              <a:defRPr sz="1350">
+                <a:solidFill>
+                  <a:srgbClr val="000000"/>
+                </a:solidFill>
+                <a:latin typeface="Helvetica Neue"/>
+                <a:ea typeface="Helvetica Neue"/>
+                <a:cs typeface="Helvetica Neue"/>
+              </a:defRPr>
+            </a:pPr>
+            <a:r>
+              <a:rPr sz="1350">
+                <a:solidFill>
+                  <a:srgbClr val="000000"/>
+                </a:solidFill>
+                <a:latin typeface="Helvetica Neue"/>
+                <a:ea typeface="Helvetica Neue"/>
+                <a:cs typeface="Helvetica Neue"/>
+              </a:rPr>
               <a:t>Reduced precision can shrink memory requirements enough to run a model on a laptop.</a:t>
             </a:r>
           </a:p>
@@ -3481,31 +3532,55 @@
           <a:lstStyle xmlns:a="http://schemas.openxmlformats.org/drawingml/2006/main"/>
           <a:p xmlns:a="http://schemas.openxmlformats.org/drawingml/2006/main">
             <a:pPr algn="l">
-              <a:defRPr sz="1600">
-                <a:solidFill>
-                  <a:srgbClr val="000000"/>
-                </a:solidFill>
-                <a:latin typeface="Helvetica Neue"/>
-                <a:ea typeface="Helvetica Neue"/>
-                <a:cs typeface="Helvetica Neue"/>
-              </a:defRPr>
-            </a:pPr>
-            <a:r>
+              <a:lnSpc>
+                <a:spcPct val="114000"/>
+              </a:lnSpc>
+              <a:buNone/>
+              <a:defRPr sz="1350">
+                <a:solidFill>
+                  <a:srgbClr val="000000"/>
+                </a:solidFill>
+                <a:latin typeface="Helvetica Neue"/>
+                <a:ea typeface="Helvetica Neue"/>
+                <a:cs typeface="Helvetica Neue"/>
+              </a:defRPr>
+            </a:pPr>
+            <a:r>
+              <a:rPr sz="1350">
+                <a:solidFill>
+                  <a:srgbClr val="000000"/>
+                </a:solidFill>
+                <a:latin typeface="Helvetica Neue"/>
+                <a:ea typeface="Helvetica Neue"/>
+                <a:cs typeface="Helvetica Neue"/>
+              </a:rPr>
               <a:t>TRADEOFF</a:t>
             </a:r>
           </a:p>
           <a:p xmlns:a="http://schemas.openxmlformats.org/drawingml/2006/main">
             <a:pPr algn="l">
-              <a:defRPr sz="1600">
-                <a:solidFill>
-                  <a:srgbClr val="000000"/>
-                </a:solidFill>
-                <a:latin typeface="Helvetica Neue"/>
-                <a:ea typeface="Helvetica Neue"/>
-                <a:cs typeface="Helvetica Neue"/>
-              </a:defRPr>
-            </a:pPr>
-            <a:r>
+              <a:lnSpc>
+                <a:spcPct val="114000"/>
+              </a:lnSpc>
+              <a:buNone/>
+              <a:defRPr sz="1350">
+                <a:solidFill>
+                  <a:srgbClr val="000000"/>
+                </a:solidFill>
+                <a:latin typeface="Helvetica Neue"/>
+                <a:ea typeface="Helvetica Neue"/>
+                <a:cs typeface="Helvetica Neue"/>
+              </a:defRPr>
+            </a:pPr>
+            <a:r>
+              <a:rPr sz="1350">
+                <a:solidFill>
+                  <a:srgbClr val="000000"/>
+                </a:solidFill>
+                <a:latin typeface="Helvetica Neue"/>
+                <a:ea typeface="Helvetica Neue"/>
+                <a:cs typeface="Helvetica Neue"/>
+              </a:rPr>
               <a:t>Smaller representations may reduce accuracy; the effect depends on model, task, and quantization.</a:t>
             </a:r>
           </a:p>
@@ -3570,31 +3645,55 @@
           <a:lstStyle xmlns:a="http://schemas.openxmlformats.org/drawingml/2006/main"/>
           <a:p xmlns:a="http://schemas.openxmlformats.org/drawingml/2006/main">
             <a:pPr algn="l">
-              <a:defRPr sz="1600">
-                <a:solidFill>
-                  <a:srgbClr val="000000"/>
-                </a:solidFill>
-                <a:latin typeface="Helvetica Neue"/>
-                <a:ea typeface="Helvetica Neue"/>
-                <a:cs typeface="Helvetica Neue"/>
-              </a:defRPr>
-            </a:pPr>
-            <a:r>
+              <a:lnSpc>
+                <a:spcPct val="114000"/>
+              </a:lnSpc>
+              <a:buNone/>
+              <a:defRPr sz="1350">
+                <a:solidFill>
+                  <a:srgbClr val="000000"/>
+                </a:solidFill>
+                <a:latin typeface="Helvetica Neue"/>
+                <a:ea typeface="Helvetica Neue"/>
+                <a:cs typeface="Helvetica Neue"/>
+              </a:defRPr>
+            </a:pPr>
+            <a:r>
+              <a:rPr sz="1350">
+                <a:solidFill>
+                  <a:srgbClr val="000000"/>
+                </a:solidFill>
+                <a:latin typeface="Helvetica Neue"/>
+                <a:ea typeface="Helvetica Neue"/>
+                <a:cs typeface="Helvetica Neue"/>
+              </a:rPr>
               <a:t>RECORD</a:t>
             </a:r>
           </a:p>
           <a:p xmlns:a="http://schemas.openxmlformats.org/drawingml/2006/main">
             <a:pPr algn="l">
-              <a:defRPr sz="1600">
-                <a:solidFill>
-                  <a:srgbClr val="000000"/>
-                </a:solidFill>
-                <a:latin typeface="Helvetica Neue"/>
-                <a:ea typeface="Helvetica Neue"/>
-                <a:cs typeface="Helvetica Neue"/>
-              </a:defRPr>
-            </a:pPr>
-            <a:r>
+              <a:lnSpc>
+                <a:spcPct val="114000"/>
+              </a:lnSpc>
+              <a:buNone/>
+              <a:defRPr sz="1350">
+                <a:solidFill>
+                  <a:srgbClr val="000000"/>
+                </a:solidFill>
+                <a:latin typeface="Helvetica Neue"/>
+                <a:ea typeface="Helvetica Neue"/>
+                <a:cs typeface="Helvetica Neue"/>
+              </a:defRPr>
+            </a:pPr>
+            <a:r>
+              <a:rPr sz="1350">
+                <a:solidFill>
+                  <a:srgbClr val="000000"/>
+                </a:solidFill>
+                <a:latin typeface="Helvetica Neue"/>
+                <a:ea typeface="Helvetica Neue"/>
+                <a:cs typeface="Helvetica Neue"/>
+              </a:rPr>
               <a:t>Capture model, quantization, context, hardware, runtime, and settings.</a:t>
             </a:r>
           </a:p>
@@ -3630,16 +3729,28 @@
           <a:lstStyle xmlns:a="http://schemas.openxmlformats.org/drawingml/2006/main"/>
           <a:p xmlns:a="http://schemas.openxmlformats.org/drawingml/2006/main">
             <a:pPr algn="l">
-              <a:defRPr sz="2400">
-                <a:solidFill>
-                  <a:srgbClr val="000000"/>
-                </a:solidFill>
-                <a:latin typeface="Helvetica Neue"/>
-                <a:ea typeface="Helvetica Neue"/>
-                <a:cs typeface="Helvetica Neue"/>
-              </a:defRPr>
-            </a:pPr>
-            <a:r>
+              <a:lnSpc>
+                <a:spcPct val="108000"/>
+              </a:lnSpc>
+              <a:buNone/>
+              <a:defRPr sz="1200" b="1">
+                <a:solidFill>
+                  <a:srgbClr val="000000"/>
+                </a:solidFill>
+                <a:latin typeface="Helvetica Neue"/>
+                <a:ea typeface="Helvetica Neue"/>
+                <a:cs typeface="Helvetica Neue"/>
+              </a:defRPr>
+            </a:pPr>
+            <a:r>
+              <a:rPr sz="1200" b="1">
+                <a:solidFill>
+                  <a:srgbClr val="000000"/>
+                </a:solidFill>
+                <a:latin typeface="Helvetica Neue"/>
+                <a:ea typeface="Helvetica Neue"/>
+                <a:cs typeface="Helvetica Neue"/>
+              </a:rPr>
               <a:t>QUALITY</a:t>
             </a:r>
           </a:p>
@@ -3675,16 +3786,28 @@
           <a:lstStyle xmlns:a="http://schemas.openxmlformats.org/drawingml/2006/main"/>
           <a:p xmlns:a="http://schemas.openxmlformats.org/drawingml/2006/main">
             <a:pPr algn="l">
-              <a:defRPr sz="2400">
-                <a:solidFill>
-                  <a:srgbClr val="000000"/>
-                </a:solidFill>
-                <a:latin typeface="Helvetica Neue"/>
-                <a:ea typeface="Helvetica Neue"/>
-                <a:cs typeface="Helvetica Neue"/>
-              </a:defRPr>
-            </a:pPr>
-            <a:r>
+              <a:lnSpc>
+                <a:spcPct val="108000"/>
+              </a:lnSpc>
+              <a:buNone/>
+              <a:defRPr sz="1200" b="1">
+                <a:solidFill>
+                  <a:srgbClr val="000000"/>
+                </a:solidFill>
+                <a:latin typeface="Helvetica Neue"/>
+                <a:ea typeface="Helvetica Neue"/>
+                <a:cs typeface="Helvetica Neue"/>
+              </a:defRPr>
+            </a:pPr>
+            <a:r>
+              <a:rPr sz="1200" b="1">
+                <a:solidFill>
+                  <a:srgbClr val="000000"/>
+                </a:solidFill>
+                <a:latin typeface="Helvetica Neue"/>
+                <a:ea typeface="Helvetica Neue"/>
+                <a:cs typeface="Helvetica Neue"/>
+              </a:rPr>
               <a:t>MEMORY</a:t>
             </a:r>
           </a:p>
@@ -3720,16 +3843,28 @@
           <a:lstStyle xmlns:a="http://schemas.openxmlformats.org/drawingml/2006/main"/>
           <a:p xmlns:a="http://schemas.openxmlformats.org/drawingml/2006/main">
             <a:pPr algn="l">
-              <a:defRPr sz="2400">
-                <a:solidFill>
-                  <a:srgbClr val="000000"/>
-                </a:solidFill>
-                <a:latin typeface="Helvetica Neue"/>
-                <a:ea typeface="Helvetica Neue"/>
-                <a:cs typeface="Helvetica Neue"/>
-              </a:defRPr>
-            </a:pPr>
-            <a:r>
+              <a:lnSpc>
+                <a:spcPct val="108000"/>
+              </a:lnSpc>
+              <a:buNone/>
+              <a:defRPr sz="1200" b="1">
+                <a:solidFill>
+                  <a:srgbClr val="000000"/>
+                </a:solidFill>
+                <a:latin typeface="Helvetica Neue"/>
+                <a:ea typeface="Helvetica Neue"/>
+                <a:cs typeface="Helvetica Neue"/>
+              </a:defRPr>
+            </a:pPr>
+            <a:r>
+              <a:rPr sz="1200" b="1">
+                <a:solidFill>
+                  <a:srgbClr val="000000"/>
+                </a:solidFill>
+                <a:latin typeface="Helvetica Neue"/>
+                <a:ea typeface="Helvetica Neue"/>
+                <a:cs typeface="Helvetica Neue"/>
+              </a:rPr>
               <a:t>EVIDENCE</a:t>
             </a:r>
           </a:p>
@@ -3787,6 +3922,7 @@
           <a:lstStyle xmlns:a="http://schemas.openxmlformats.org/drawingml/2006/main"/>
           <a:p xmlns:a="http://schemas.openxmlformats.org/drawingml/2006/main">
             <a:pPr algn="l">
+              <a:buNone/>
               <a:defRPr sz="6000">
                 <a:solidFill>
                   <a:srgbClr val="000000"/>
@@ -3833,6 +3969,7 @@
           <a:lstStyle xmlns:a="http://schemas.openxmlformats.org/drawingml/2006/main"/>
           <a:p xmlns:a="http://schemas.openxmlformats.org/drawingml/2006/main">
             <a:pPr algn="l">
+              <a:buNone/>
               <a:defRPr sz="2400">
                 <a:solidFill>
                   <a:srgbClr val="000000"/>
@@ -3878,6 +4015,7 @@
           <a:lstStyle xmlns:a="http://schemas.openxmlformats.org/drawingml/2006/main"/>
           <a:p xmlns:a="http://schemas.openxmlformats.org/drawingml/2006/main">
             <a:pPr algn="l">
+              <a:buNone/>
               <a:defRPr sz="2400">
                 <a:solidFill>
                   <a:srgbClr val="000000"/>
@@ -3943,16 +4081,28 @@
           <a:lstStyle xmlns:a="http://schemas.openxmlformats.org/drawingml/2006/main"/>
           <a:p xmlns:a="http://schemas.openxmlformats.org/drawingml/2006/main">
             <a:pPr algn="r">
-              <a:defRPr sz="1000">
-                <a:solidFill>
-                  <a:srgbClr val="000000"/>
-                </a:solidFill>
-                <a:latin typeface="Helvetica Neue"/>
-                <a:ea typeface="Helvetica Neue"/>
-                <a:cs typeface="Helvetica Neue"/>
-              </a:defRPr>
-            </a:pPr>
-            <a:r>
+              <a:lnSpc>
+                <a:spcPct val="108000"/>
+              </a:lnSpc>
+              <a:buNone/>
+              <a:defRPr sz="1200" b="1">
+                <a:solidFill>
+                  <a:srgbClr val="000000"/>
+                </a:solidFill>
+                <a:latin typeface="Helvetica Neue"/>
+                <a:ea typeface="Helvetica Neue"/>
+                <a:cs typeface="Helvetica Neue"/>
+              </a:defRPr>
+            </a:pPr>
+            <a:r>
+              <a:rPr sz="1200" b="1">
+                <a:solidFill>
+                  <a:srgbClr val="000000"/>
+                </a:solidFill>
+                <a:latin typeface="Helvetica Neue"/>
+                <a:ea typeface="Helvetica Neue"/>
+                <a:cs typeface="Helvetica Neue"/>
+              </a:rPr>
               <a:t>7</a:t>
             </a:r>
           </a:p>
@@ -3988,16 +4138,28 @@
           <a:lstStyle xmlns:a="http://schemas.openxmlformats.org/drawingml/2006/main"/>
           <a:p xmlns:a="http://schemas.openxmlformats.org/drawingml/2006/main">
             <a:pPr algn="l">
-              <a:defRPr sz="2900">
-                <a:solidFill>
-                  <a:srgbClr val="000000"/>
-                </a:solidFill>
-                <a:latin typeface="Helvetica Neue"/>
-                <a:ea typeface="Helvetica Neue"/>
-                <a:cs typeface="Helvetica Neue"/>
-              </a:defRPr>
-            </a:pPr>
-            <a:r>
+              <a:lnSpc>
+                <a:spcPct val="98000"/>
+              </a:lnSpc>
+              <a:buNone/>
+              <a:defRPr sz="3375" b="1">
+                <a:solidFill>
+                  <a:srgbClr val="000000"/>
+                </a:solidFill>
+                <a:latin typeface="Helvetica Neue"/>
+                <a:ea typeface="Helvetica Neue"/>
+                <a:cs typeface="Helvetica Neue"/>
+              </a:defRPr>
+            </a:pPr>
+            <a:r>
+              <a:rPr sz="3375" b="1">
+                <a:solidFill>
+                  <a:srgbClr val="000000"/>
+                </a:solidFill>
+                <a:latin typeface="Helvetica Neue"/>
+                <a:ea typeface="Helvetica Neue"/>
+                <a:cs typeface="Helvetica Neue"/>
+              </a:rPr>
               <a:t>A simple organizational model vocabulary</a:t>
             </a:r>
           </a:p>
@@ -4031,31 +4193,55 @@
           <a:lstStyle xmlns:a="http://schemas.openxmlformats.org/drawingml/2006/main"/>
           <a:p xmlns:a="http://schemas.openxmlformats.org/drawingml/2006/main">
             <a:pPr algn="l">
-              <a:defRPr sz="2400">
-                <a:solidFill>
-                  <a:srgbClr val="000000"/>
-                </a:solidFill>
-                <a:latin typeface="Helvetica Neue"/>
-                <a:ea typeface="Helvetica Neue"/>
-                <a:cs typeface="Helvetica Neue"/>
-              </a:defRPr>
-            </a:pPr>
-            <a:r>
+              <a:lnSpc>
+                <a:spcPct val="114000"/>
+              </a:lnSpc>
+              <a:buNone/>
+              <a:defRPr sz="1500">
+                <a:solidFill>
+                  <a:srgbClr val="000000"/>
+                </a:solidFill>
+                <a:latin typeface="Helvetica Neue"/>
+                <a:ea typeface="Helvetica Neue"/>
+                <a:cs typeface="Helvetica Neue"/>
+              </a:defRPr>
+            </a:pPr>
+            <a:r>
+              <a:rPr sz="1500">
+                <a:solidFill>
+                  <a:srgbClr val="000000"/>
+                </a:solidFill>
+                <a:latin typeface="Helvetica Neue"/>
+                <a:ea typeface="Helvetica Neue"/>
+                <a:cs typeface="Helvetica Neue"/>
+              </a:rPr>
               <a:t>UTILITY</a:t>
             </a:r>
           </a:p>
           <a:p xmlns:a="http://schemas.openxmlformats.org/drawingml/2006/main">
             <a:pPr algn="l">
-              <a:defRPr sz="2400">
-                <a:solidFill>
-                  <a:srgbClr val="000000"/>
-                </a:solidFill>
-                <a:latin typeface="Helvetica Neue"/>
-                <a:ea typeface="Helvetica Neue"/>
-                <a:cs typeface="Helvetica Neue"/>
-              </a:defRPr>
-            </a:pPr>
-            <a:r>
+              <a:lnSpc>
+                <a:spcPct val="114000"/>
+              </a:lnSpc>
+              <a:buNone/>
+              <a:defRPr sz="1500">
+                <a:solidFill>
+                  <a:srgbClr val="000000"/>
+                </a:solidFill>
+                <a:latin typeface="Helvetica Neue"/>
+                <a:ea typeface="Helvetica Neue"/>
+                <a:cs typeface="Helvetica Neue"/>
+              </a:defRPr>
+            </a:pPr>
+            <a:r>
+              <a:rPr sz="1500">
+                <a:solidFill>
+                  <a:srgbClr val="000000"/>
+                </a:solidFill>
+                <a:latin typeface="Helvetica Neue"/>
+                <a:ea typeface="Helvetica Neue"/>
+                <a:cs typeface="Helvetica Neue"/>
+              </a:rPr>
               <a:t>Formatting, extraction, classification, and tightly bounded transformations.</a:t>
             </a:r>
           </a:p>
@@ -4089,31 +4275,55 @@
           <a:lstStyle xmlns:a="http://schemas.openxmlformats.org/drawingml/2006/main"/>
           <a:p xmlns:a="http://schemas.openxmlformats.org/drawingml/2006/main">
             <a:pPr algn="l">
-              <a:defRPr sz="2400">
-                <a:solidFill>
-                  <a:srgbClr val="000000"/>
-                </a:solidFill>
-                <a:latin typeface="Helvetica Neue"/>
-                <a:ea typeface="Helvetica Neue"/>
-                <a:cs typeface="Helvetica Neue"/>
-              </a:defRPr>
-            </a:pPr>
-            <a:r>
+              <a:lnSpc>
+                <a:spcPct val="114000"/>
+              </a:lnSpc>
+              <a:buNone/>
+              <a:defRPr sz="1500">
+                <a:solidFill>
+                  <a:srgbClr val="000000"/>
+                </a:solidFill>
+                <a:latin typeface="Helvetica Neue"/>
+                <a:ea typeface="Helvetica Neue"/>
+                <a:cs typeface="Helvetica Neue"/>
+              </a:defRPr>
+            </a:pPr>
+            <a:r>
+              <a:rPr sz="1500">
+                <a:solidFill>
+                  <a:srgbClr val="000000"/>
+                </a:solidFill>
+                <a:latin typeface="Helvetica Neue"/>
+                <a:ea typeface="Helvetica Neue"/>
+                <a:cs typeface="Helvetica Neue"/>
+              </a:rPr>
               <a:t>WORKHORSE</a:t>
             </a:r>
           </a:p>
           <a:p xmlns:a="http://schemas.openxmlformats.org/drawingml/2006/main">
             <a:pPr algn="l">
-              <a:defRPr sz="2400">
-                <a:solidFill>
-                  <a:srgbClr val="000000"/>
-                </a:solidFill>
-                <a:latin typeface="Helvetica Neue"/>
-                <a:ea typeface="Helvetica Neue"/>
-                <a:cs typeface="Helvetica Neue"/>
-              </a:defRPr>
-            </a:pPr>
-            <a:r>
+              <a:lnSpc>
+                <a:spcPct val="114000"/>
+              </a:lnSpc>
+              <a:buNone/>
+              <a:defRPr sz="1500">
+                <a:solidFill>
+                  <a:srgbClr val="000000"/>
+                </a:solidFill>
+                <a:latin typeface="Helvetica Neue"/>
+                <a:ea typeface="Helvetica Neue"/>
+                <a:cs typeface="Helvetica Neue"/>
+              </a:defRPr>
+            </a:pPr>
+            <a:r>
+              <a:rPr sz="1500">
+                <a:solidFill>
+                  <a:srgbClr val="000000"/>
+                </a:solidFill>
+                <a:latin typeface="Helvetica Neue"/>
+                <a:ea typeface="Helvetica Neue"/>
+                <a:cs typeface="Helvetica Neue"/>
+              </a:rPr>
               <a:t>Routine coding, summaries, documentation, and ordinary analysis.</a:t>
             </a:r>
           </a:p>
@@ -4149,31 +4359,55 @@
           <a:lstStyle xmlns:a="http://schemas.openxmlformats.org/drawingml/2006/main"/>
           <a:p xmlns:a="http://schemas.openxmlformats.org/drawingml/2006/main">
             <a:pPr algn="l">
-              <a:defRPr sz="2400">
-                <a:solidFill>
-                  <a:srgbClr val="000000"/>
-                </a:solidFill>
-                <a:latin typeface="Helvetica Neue"/>
-                <a:ea typeface="Helvetica Neue"/>
-                <a:cs typeface="Helvetica Neue"/>
-              </a:defRPr>
-            </a:pPr>
-            <a:r>
+              <a:lnSpc>
+                <a:spcPct val="114000"/>
+              </a:lnSpc>
+              <a:buNone/>
+              <a:defRPr sz="1500">
+                <a:solidFill>
+                  <a:srgbClr val="000000"/>
+                </a:solidFill>
+                <a:latin typeface="Helvetica Neue"/>
+                <a:ea typeface="Helvetica Neue"/>
+                <a:cs typeface="Helvetica Neue"/>
+              </a:defRPr>
+            </a:pPr>
+            <a:r>
+              <a:rPr sz="1500">
+                <a:solidFill>
+                  <a:srgbClr val="000000"/>
+                </a:solidFill>
+                <a:latin typeface="Helvetica Neue"/>
+                <a:ea typeface="Helvetica Neue"/>
+                <a:cs typeface="Helvetica Neue"/>
+              </a:rPr>
               <a:t>SPECIALIST</a:t>
             </a:r>
           </a:p>
           <a:p xmlns:a="http://schemas.openxmlformats.org/drawingml/2006/main">
             <a:pPr algn="l">
-              <a:defRPr sz="2400">
-                <a:solidFill>
-                  <a:srgbClr val="000000"/>
-                </a:solidFill>
-                <a:latin typeface="Helvetica Neue"/>
-                <a:ea typeface="Helvetica Neue"/>
-                <a:cs typeface="Helvetica Neue"/>
-              </a:defRPr>
-            </a:pPr>
-            <a:r>
+              <a:lnSpc>
+                <a:spcPct val="114000"/>
+              </a:lnSpc>
+              <a:buNone/>
+              <a:defRPr sz="1500">
+                <a:solidFill>
+                  <a:srgbClr val="000000"/>
+                </a:solidFill>
+                <a:latin typeface="Helvetica Neue"/>
+                <a:ea typeface="Helvetica Neue"/>
+                <a:cs typeface="Helvetica Neue"/>
+              </a:defRPr>
+            </a:pPr>
+            <a:r>
+              <a:rPr sz="1500">
+                <a:solidFill>
+                  <a:srgbClr val="000000"/>
+                </a:solidFill>
+                <a:latin typeface="Helvetica Neue"/>
+                <a:ea typeface="Helvetica Neue"/>
+                <a:cs typeface="Helvetica Neue"/>
+              </a:rPr>
               <a:t>Debugging, review, multi-file work, and domain analysis.</a:t>
             </a:r>
           </a:p>
@@ -4209,31 +4443,55 @@
           <a:lstStyle xmlns:a="http://schemas.openxmlformats.org/drawingml/2006/main"/>
           <a:p xmlns:a="http://schemas.openxmlformats.org/drawingml/2006/main">
             <a:pPr algn="l">
-              <a:defRPr sz="2400">
-                <a:solidFill>
-                  <a:srgbClr val="000000"/>
-                </a:solidFill>
-                <a:latin typeface="Helvetica Neue"/>
-                <a:ea typeface="Helvetica Neue"/>
-                <a:cs typeface="Helvetica Neue"/>
-              </a:defRPr>
-            </a:pPr>
-            <a:r>
+              <a:lnSpc>
+                <a:spcPct val="114000"/>
+              </a:lnSpc>
+              <a:buNone/>
+              <a:defRPr sz="1500">
+                <a:solidFill>
+                  <a:srgbClr val="000000"/>
+                </a:solidFill>
+                <a:latin typeface="Helvetica Neue"/>
+                <a:ea typeface="Helvetica Neue"/>
+                <a:cs typeface="Helvetica Neue"/>
+              </a:defRPr>
+            </a:pPr>
+            <a:r>
+              <a:rPr sz="1500">
+                <a:solidFill>
+                  <a:srgbClr val="000000"/>
+                </a:solidFill>
+                <a:latin typeface="Helvetica Neue"/>
+                <a:ea typeface="Helvetica Neue"/>
+                <a:cs typeface="Helvetica Neue"/>
+              </a:rPr>
               <a:t>DEEP THINKER</a:t>
             </a:r>
           </a:p>
           <a:p xmlns:a="http://schemas.openxmlformats.org/drawingml/2006/main">
             <a:pPr algn="l">
-              <a:defRPr sz="2400">
-                <a:solidFill>
-                  <a:srgbClr val="000000"/>
-                </a:solidFill>
-                <a:latin typeface="Helvetica Neue"/>
-                <a:ea typeface="Helvetica Neue"/>
-                <a:cs typeface="Helvetica Neue"/>
-              </a:defRPr>
-            </a:pPr>
-            <a:r>
+              <a:lnSpc>
+                <a:spcPct val="114000"/>
+              </a:lnSpc>
+              <a:buNone/>
+              <a:defRPr sz="1500">
+                <a:solidFill>
+                  <a:srgbClr val="000000"/>
+                </a:solidFill>
+                <a:latin typeface="Helvetica Neue"/>
+                <a:ea typeface="Helvetica Neue"/>
+                <a:cs typeface="Helvetica Neue"/>
+              </a:defRPr>
+            </a:pPr>
+            <a:r>
+              <a:rPr sz="1500">
+                <a:solidFill>
+                  <a:srgbClr val="000000"/>
+                </a:solidFill>
+                <a:latin typeface="Helvetica Neue"/>
+                <a:ea typeface="Helvetica Neue"/>
+                <a:cs typeface="Helvetica Neue"/>
+              </a:rPr>
               <a:t>Architecture, ambiguity, difficult synthesis, and recovery.</a:t>
             </a:r>
           </a:p>
@@ -4291,6 +4549,7 @@
           <a:lstStyle xmlns:a="http://schemas.openxmlformats.org/drawingml/2006/main"/>
           <a:p xmlns:a="http://schemas.openxmlformats.org/drawingml/2006/main">
             <a:pPr algn="r">
+              <a:buNone/>
               <a:defRPr sz="1000">
                 <a:solidFill>
                   <a:srgbClr val="000000"/>
@@ -4336,6 +4595,7 @@
           <a:lstStyle xmlns:a="http://schemas.openxmlformats.org/drawingml/2006/main"/>
           <a:p xmlns:a="http://schemas.openxmlformats.org/drawingml/2006/main">
             <a:pPr algn="l">
+              <a:buNone/>
               <a:defRPr sz="2900">
                 <a:solidFill>
                   <a:srgbClr val="000000"/>
@@ -4381,6 +4641,7 @@
           <a:lstStyle xmlns:a="http://schemas.openxmlformats.org/drawingml/2006/main"/>
           <a:p xmlns:a="http://schemas.openxmlformats.org/drawingml/2006/main">
             <a:pPr algn="l">
+              <a:buNone/>
               <a:defRPr sz="2400">
                 <a:solidFill>
                   <a:srgbClr val="000000"/>
@@ -4396,6 +4657,7 @@
           </a:p>
           <a:p xmlns:a="http://schemas.openxmlformats.org/drawingml/2006/main">
             <a:pPr algn="l">
+              <a:buNone/>
               <a:defRPr sz="2400">
                 <a:solidFill>
                   <a:srgbClr val="000000"/>
@@ -4441,6 +4703,7 @@
           <a:lstStyle xmlns:a="http://schemas.openxmlformats.org/drawingml/2006/main"/>
           <a:p xmlns:a="http://schemas.openxmlformats.org/drawingml/2006/main">
             <a:pPr algn="l">
+              <a:buNone/>
               <a:defRPr sz="2400">
                 <a:solidFill>
                   <a:srgbClr val="000000"/>
@@ -4456,6 +4719,7 @@
           </a:p>
           <a:p xmlns:a="http://schemas.openxmlformats.org/drawingml/2006/main">
             <a:pPr algn="l">
+              <a:buNone/>
               <a:defRPr sz="2400">
                 <a:solidFill>
                   <a:srgbClr val="000000"/>
@@ -4501,6 +4765,7 @@
           <a:lstStyle xmlns:a="http://schemas.openxmlformats.org/drawingml/2006/main"/>
           <a:p xmlns:a="http://schemas.openxmlformats.org/drawingml/2006/main">
             <a:pPr algn="l">
+              <a:buNone/>
               <a:defRPr sz="2400">
                 <a:solidFill>
                   <a:srgbClr val="000000"/>
@@ -4516,6 +4781,7 @@
           </a:p>
           <a:p xmlns:a="http://schemas.openxmlformats.org/drawingml/2006/main">
             <a:pPr algn="l">
+              <a:buNone/>
               <a:defRPr sz="2400">
                 <a:solidFill>
                   <a:srgbClr val="000000"/>
@@ -4583,16 +4849,28 @@
           <a:lstStyle xmlns:a="http://schemas.openxmlformats.org/drawingml/2006/main"/>
           <a:p xmlns:a="http://schemas.openxmlformats.org/drawingml/2006/main">
             <a:pPr algn="l">
-              <a:defRPr sz="6000">
-                <a:solidFill>
-                  <a:srgbClr val="000000"/>
-                </a:solidFill>
-                <a:latin typeface="Helvetica Neue"/>
-                <a:ea typeface="Helvetica Neue"/>
-                <a:cs typeface="Helvetica Neue"/>
-              </a:defRPr>
-            </a:pPr>
-            <a:r>
+              <a:lnSpc>
+                <a:spcPct val="98000"/>
+              </a:lnSpc>
+              <a:buNone/>
+              <a:defRPr sz="3225" b="1">
+                <a:solidFill>
+                  <a:srgbClr val="000000"/>
+                </a:solidFill>
+                <a:latin typeface="Helvetica Neue"/>
+                <a:ea typeface="Helvetica Neue"/>
+                <a:cs typeface="Helvetica Neue"/>
+              </a:defRPr>
+            </a:pPr>
+            <a:r>
+              <a:rPr sz="3225" b="1">
+                <a:solidFill>
+                  <a:srgbClr val="000000"/>
+                </a:solidFill>
+                <a:latin typeface="Helvetica Neue"/>
+                <a:ea typeface="Helvetica Neue"/>
+                <a:cs typeface="Helvetica Neue"/>
+              </a:rPr>
               <a:t>The router asks what level of capability,
 thought, speed, cost, and control this task needs.</a:t>
             </a:r>
@@ -4629,6 +4907,7 @@
           <a:lstStyle xmlns:a="http://schemas.openxmlformats.org/drawingml/2006/main"/>
           <a:p xmlns:a="http://schemas.openxmlformats.org/drawingml/2006/main">
             <a:pPr algn="l">
+              <a:buNone/>
               <a:defRPr sz="2400">
                 <a:solidFill>
                   <a:srgbClr val="000000"/>
@@ -4674,6 +4953,7 @@
           <a:lstStyle xmlns:a="http://schemas.openxmlformats.org/drawingml/2006/main"/>
           <a:p xmlns:a="http://schemas.openxmlformats.org/drawingml/2006/main">
             <a:pPr algn="l">
+              <a:buNone/>
               <a:defRPr sz="2400">
                 <a:solidFill>
                   <a:srgbClr val="000000"/>
@@ -4739,6 +5019,7 @@
           <a:lstStyle xmlns:a="http://schemas.openxmlformats.org/drawingml/2006/main"/>
           <a:p xmlns:a="http://schemas.openxmlformats.org/drawingml/2006/main">
             <a:pPr algn="r">
+              <a:buNone/>
               <a:defRPr sz="1000">
                 <a:solidFill>
                   <a:srgbClr val="000000"/>
@@ -4784,6 +5065,7 @@
           <a:lstStyle xmlns:a="http://schemas.openxmlformats.org/drawingml/2006/main"/>
           <a:p xmlns:a="http://schemas.openxmlformats.org/drawingml/2006/main">
             <a:pPr algn="l">
+              <a:buNone/>
               <a:defRPr sz="2900">
                 <a:solidFill>
                   <a:srgbClr val="000000"/>
@@ -4827,6 +5109,7 @@
           <a:lstStyle xmlns:a="http://schemas.openxmlformats.org/drawingml/2006/main"/>
           <a:p xmlns:a="http://schemas.openxmlformats.org/drawingml/2006/main">
             <a:pPr algn="l">
+              <a:buNone/>
               <a:defRPr sz="2400">
                 <a:solidFill>
                   <a:srgbClr val="000000"/>
@@ -4842,6 +5125,7 @@
           </a:p>
           <a:p xmlns:a="http://schemas.openxmlformats.org/drawingml/2006/main">
             <a:pPr algn="l">
+              <a:buNone/>
               <a:defRPr sz="2400">
                 <a:solidFill>
                   <a:srgbClr val="000000"/>
@@ -4885,6 +5169,7 @@
           <a:lstStyle xmlns:a="http://schemas.openxmlformats.org/drawingml/2006/main"/>
           <a:p xmlns:a="http://schemas.openxmlformats.org/drawingml/2006/main">
             <a:pPr algn="l">
+              <a:buNone/>
               <a:defRPr sz="2400">
                 <a:solidFill>
                   <a:srgbClr val="000000"/>
@@ -4900,6 +5185,7 @@
           </a:p>
           <a:p xmlns:a="http://schemas.openxmlformats.org/drawingml/2006/main">
             <a:pPr algn="l">
+              <a:buNone/>
               <a:defRPr sz="2400">
                 <a:solidFill>
                   <a:srgbClr val="000000"/>
@@ -4945,6 +5231,7 @@
           <a:lstStyle xmlns:a="http://schemas.openxmlformats.org/drawingml/2006/main"/>
           <a:p xmlns:a="http://schemas.openxmlformats.org/drawingml/2006/main">
             <a:pPr algn="l">
+              <a:buNone/>
               <a:defRPr sz="2400">
                 <a:solidFill>
                   <a:srgbClr val="000000"/>
@@ -4960,6 +5247,7 @@
           </a:p>
           <a:p xmlns:a="http://schemas.openxmlformats.org/drawingml/2006/main">
             <a:pPr algn="l">
+              <a:buNone/>
               <a:defRPr sz="2400">
                 <a:solidFill>
                   <a:srgbClr val="000000"/>
@@ -5005,6 +5293,7 @@
           <a:lstStyle xmlns:a="http://schemas.openxmlformats.org/drawingml/2006/main"/>
           <a:p xmlns:a="http://schemas.openxmlformats.org/drawingml/2006/main">
             <a:pPr algn="l">
+              <a:buNone/>
               <a:defRPr sz="2400">
                 <a:solidFill>
                   <a:srgbClr val="000000"/>
@@ -5020,6 +5309,7 @@
           </a:p>
           <a:p xmlns:a="http://schemas.openxmlformats.org/drawingml/2006/main">
             <a:pPr algn="l">
+              <a:buNone/>
               <a:defRPr sz="2400">
                 <a:solidFill>
                   <a:srgbClr val="000000"/>
@@ -5085,16 +5375,28 @@
           <a:lstStyle xmlns:a="http://schemas.openxmlformats.org/drawingml/2006/main"/>
           <a:p xmlns:a="http://schemas.openxmlformats.org/drawingml/2006/main">
             <a:pPr algn="r">
-              <a:defRPr sz="1000">
-                <a:solidFill>
-                  <a:srgbClr val="000000"/>
-                </a:solidFill>
-                <a:latin typeface="Helvetica Neue"/>
-                <a:ea typeface="Helvetica Neue"/>
-                <a:cs typeface="Helvetica Neue"/>
-              </a:defRPr>
-            </a:pPr>
-            <a:r>
+              <a:lnSpc>
+                <a:spcPct val="108000"/>
+              </a:lnSpc>
+              <a:buNone/>
+              <a:defRPr sz="1200" b="1">
+                <a:solidFill>
+                  <a:srgbClr val="000000"/>
+                </a:solidFill>
+                <a:latin typeface="Helvetica Neue"/>
+                <a:ea typeface="Helvetica Neue"/>
+                <a:cs typeface="Helvetica Neue"/>
+              </a:defRPr>
+            </a:pPr>
+            <a:r>
+              <a:rPr sz="1200" b="1">
+                <a:solidFill>
+                  <a:srgbClr val="000000"/>
+                </a:solidFill>
+                <a:latin typeface="Helvetica Neue"/>
+                <a:ea typeface="Helvetica Neue"/>
+                <a:cs typeface="Helvetica Neue"/>
+              </a:rPr>
               <a:t>10</a:t>
             </a:r>
           </a:p>
@@ -5130,16 +5432,28 @@
           <a:lstStyle xmlns:a="http://schemas.openxmlformats.org/drawingml/2006/main"/>
           <a:p xmlns:a="http://schemas.openxmlformats.org/drawingml/2006/main">
             <a:pPr algn="l">
-              <a:defRPr sz="2900">
-                <a:solidFill>
-                  <a:srgbClr val="000000"/>
-                </a:solidFill>
-                <a:latin typeface="Helvetica Neue"/>
-                <a:ea typeface="Helvetica Neue"/>
-                <a:cs typeface="Helvetica Neue"/>
-              </a:defRPr>
-            </a:pPr>
-            <a:r>
+              <a:lnSpc>
+                <a:spcPct val="98000"/>
+              </a:lnSpc>
+              <a:buNone/>
+              <a:defRPr sz="3375" b="1">
+                <a:solidFill>
+                  <a:srgbClr val="000000"/>
+                </a:solidFill>
+                <a:latin typeface="Helvetica Neue"/>
+                <a:ea typeface="Helvetica Neue"/>
+                <a:cs typeface="Helvetica Neue"/>
+              </a:defRPr>
+            </a:pPr>
+            <a:r>
+              <a:rPr sz="3375" b="1">
+                <a:solidFill>
+                  <a:srgbClr val="000000"/>
+                </a:solidFill>
+                <a:latin typeface="Helvetica Neue"/>
+                <a:ea typeface="Helvetica Neue"/>
+                <a:cs typeface="Helvetica Neue"/>
+              </a:rPr>
               <a:t>OpenRouter is an example—not the lesson</a:t>
             </a:r>
           </a:p>
@@ -5147,7 +5461,7 @@
       </p:sp>
       <p:cxnSp>
         <p:nvCxnSpPr>
-          <p:cNvPr id="18" name="Google-Shape-2259-p159-4"/>
+          <p:cNvPr id="27" name="Google-Shape-2259-p159-4"/>
           <p:cNvCxnSpPr/>
           <p:nvPr/>
         </p:nvCxnSpPr>
@@ -5307,31 +5621,55 @@
           <a:lstStyle xmlns:a="http://schemas.openxmlformats.org/drawingml/2006/main"/>
           <a:p xmlns:a="http://schemas.openxmlformats.org/drawingml/2006/main">
             <a:pPr algn="l">
-              <a:defRPr sz="1600">
-                <a:solidFill>
-                  <a:srgbClr val="000000"/>
-                </a:solidFill>
-                <a:latin typeface="Helvetica Neue"/>
-                <a:ea typeface="Helvetica Neue"/>
-                <a:cs typeface="Helvetica Neue"/>
-              </a:defRPr>
-            </a:pPr>
-            <a:r>
+              <a:lnSpc>
+                <a:spcPct val="114000"/>
+              </a:lnSpc>
+              <a:buNone/>
+              <a:defRPr sz="1350">
+                <a:solidFill>
+                  <a:srgbClr val="000000"/>
+                </a:solidFill>
+                <a:latin typeface="Helvetica Neue"/>
+                <a:ea typeface="Helvetica Neue"/>
+                <a:cs typeface="Helvetica Neue"/>
+              </a:defRPr>
+            </a:pPr>
+            <a:r>
+              <a:rPr sz="1350">
+                <a:solidFill>
+                  <a:srgbClr val="000000"/>
+                </a:solidFill>
+                <a:latin typeface="Helvetica Neue"/>
+                <a:ea typeface="Helvetica Neue"/>
+                <a:cs typeface="Helvetica Neue"/>
+              </a:rPr>
               <a:t>WHY IT IS VISIBLE</a:t>
             </a:r>
           </a:p>
           <a:p xmlns:a="http://schemas.openxmlformats.org/drawingml/2006/main">
             <a:pPr algn="l">
-              <a:defRPr sz="1600">
-                <a:solidFill>
-                  <a:srgbClr val="000000"/>
-                </a:solidFill>
-                <a:latin typeface="Helvetica Neue"/>
-                <a:ea typeface="Helvetica Neue"/>
-                <a:cs typeface="Helvetica Neue"/>
-              </a:defRPr>
-            </a:pPr>
-            <a:r>
+              <a:lnSpc>
+                <a:spcPct val="114000"/>
+              </a:lnSpc>
+              <a:buNone/>
+              <a:defRPr sz="1350">
+                <a:solidFill>
+                  <a:srgbClr val="000000"/>
+                </a:solidFill>
+                <a:latin typeface="Helvetica Neue"/>
+                <a:ea typeface="Helvetica Neue"/>
+                <a:cs typeface="Helvetica Neue"/>
+              </a:defRPr>
+            </a:pPr>
+            <a:r>
+              <a:rPr sz="1350">
+                <a:solidFill>
+                  <a:srgbClr val="000000"/>
+                </a:solidFill>
+                <a:latin typeface="Helvetica Neue"/>
+                <a:ea typeface="Helvetica Neue"/>
+                <a:cs typeface="Helvetica Neue"/>
+              </a:rPr>
               <a:t>One API can expose many models, with automatic model and provider routing.</a:t>
             </a:r>
           </a:p>
@@ -5396,31 +5734,55 @@
           <a:lstStyle xmlns:a="http://schemas.openxmlformats.org/drawingml/2006/main"/>
           <a:p xmlns:a="http://schemas.openxmlformats.org/drawingml/2006/main">
             <a:pPr algn="l">
-              <a:defRPr sz="1600">
-                <a:solidFill>
-                  <a:srgbClr val="000000"/>
-                </a:solidFill>
-                <a:latin typeface="Helvetica Neue"/>
-                <a:ea typeface="Helvetica Neue"/>
-                <a:cs typeface="Helvetica Neue"/>
-              </a:defRPr>
-            </a:pPr>
-            <a:r>
+              <a:lnSpc>
+                <a:spcPct val="114000"/>
+              </a:lnSpc>
+              <a:buNone/>
+              <a:defRPr sz="1350">
+                <a:solidFill>
+                  <a:srgbClr val="000000"/>
+                </a:solidFill>
+                <a:latin typeface="Helvetica Neue"/>
+                <a:ea typeface="Helvetica Neue"/>
+                <a:cs typeface="Helvetica Neue"/>
+              </a:defRPr>
+            </a:pPr>
+            <a:r>
+              <a:rPr sz="1350">
+                <a:solidFill>
+                  <a:srgbClr val="000000"/>
+                </a:solidFill>
+                <a:latin typeface="Helvetica Neue"/>
+                <a:ea typeface="Helvetica Neue"/>
+                <a:cs typeface="Helvetica Neue"/>
+              </a:rPr>
               <a:t>WHY IT IS TIMELY</a:t>
             </a:r>
           </a:p>
           <a:p xmlns:a="http://schemas.openxmlformats.org/drawingml/2006/main">
             <a:pPr algn="l">
-              <a:defRPr sz="1600">
-                <a:solidFill>
-                  <a:srgbClr val="000000"/>
-                </a:solidFill>
-                <a:latin typeface="Helvetica Neue"/>
-                <a:ea typeface="Helvetica Neue"/>
-                <a:cs typeface="Helvetica Neue"/>
-              </a:defRPr>
-            </a:pPr>
-            <a:r>
+              <a:lnSpc>
+                <a:spcPct val="114000"/>
+              </a:lnSpc>
+              <a:buNone/>
+              <a:defRPr sz="1350">
+                <a:solidFill>
+                  <a:srgbClr val="000000"/>
+                </a:solidFill>
+                <a:latin typeface="Helvetica Neue"/>
+                <a:ea typeface="Helvetica Neue"/>
+                <a:cs typeface="Helvetica Neue"/>
+              </a:defRPr>
+            </a:pPr>
+            <a:r>
+              <a:rPr sz="1350">
+                <a:solidFill>
+                  <a:srgbClr val="000000"/>
+                </a:solidFill>
+                <a:latin typeface="Helvetica Neue"/>
+                <a:ea typeface="Helvetica Neue"/>
+                <a:cs typeface="Helvetica Neue"/>
+              </a:rPr>
               <a:t>Reported acquisition talks signal that routing and inference economics may be strategically valuable.</a:t>
             </a:r>
           </a:p>
@@ -5485,31 +5847,55 @@
           <a:lstStyle xmlns:a="http://schemas.openxmlformats.org/drawingml/2006/main"/>
           <a:p xmlns:a="http://schemas.openxmlformats.org/drawingml/2006/main">
             <a:pPr algn="l">
-              <a:defRPr sz="1600">
-                <a:solidFill>
-                  <a:srgbClr val="000000"/>
-                </a:solidFill>
-                <a:latin typeface="Helvetica Neue"/>
-                <a:ea typeface="Helvetica Neue"/>
-                <a:cs typeface="Helvetica Neue"/>
-              </a:defRPr>
-            </a:pPr>
-            <a:r>
+              <a:lnSpc>
+                <a:spcPct val="114000"/>
+              </a:lnSpc>
+              <a:buNone/>
+              <a:defRPr sz="1350">
+                <a:solidFill>
+                  <a:srgbClr val="000000"/>
+                </a:solidFill>
+                <a:latin typeface="Helvetica Neue"/>
+                <a:ea typeface="Helvetica Neue"/>
+                <a:cs typeface="Helvetica Neue"/>
+              </a:defRPr>
+            </a:pPr>
+            <a:r>
+              <a:rPr sz="1350">
+                <a:solidFill>
+                  <a:srgbClr val="000000"/>
+                </a:solidFill>
+                <a:latin typeface="Helvetica Neue"/>
+                <a:ea typeface="Helvetica Neue"/>
+                <a:cs typeface="Helvetica Neue"/>
+              </a:rPr>
               <a:t>COURSE POSITION</a:t>
             </a:r>
           </a:p>
           <a:p xmlns:a="http://schemas.openxmlformats.org/drawingml/2006/main">
             <a:pPr algn="l">
-              <a:defRPr sz="1600">
-                <a:solidFill>
-                  <a:srgbClr val="000000"/>
-                </a:solidFill>
-                <a:latin typeface="Helvetica Neue"/>
-                <a:ea typeface="Helvetica Neue"/>
-                <a:cs typeface="Helvetica Neue"/>
-              </a:defRPr>
-            </a:pPr>
-            <a:r>
+              <a:lnSpc>
+                <a:spcPct val="114000"/>
+              </a:lnSpc>
+              <a:buNone/>
+              <a:defRPr sz="1350">
+                <a:solidFill>
+                  <a:srgbClr val="000000"/>
+                </a:solidFill>
+                <a:latin typeface="Helvetica Neue"/>
+                <a:ea typeface="Helvetica Neue"/>
+                <a:cs typeface="Helvetica Neue"/>
+              </a:defRPr>
+            </a:pPr>
+            <a:r>
+              <a:rPr sz="1350">
+                <a:solidFill>
+                  <a:srgbClr val="000000"/>
+                </a:solidFill>
+                <a:latin typeface="Helvetica Neue"/>
+                <a:ea typeface="Helvetica Neue"/>
+                <a:cs typeface="Helvetica Neue"/>
+              </a:rPr>
               <a:t>We do not use or recommend it. The class remains provider-neutral.</a:t>
             </a:r>
           </a:p>
@@ -5545,16 +5931,28 @@
           <a:lstStyle xmlns:a="http://schemas.openxmlformats.org/drawingml/2006/main"/>
           <a:p xmlns:a="http://schemas.openxmlformats.org/drawingml/2006/main">
             <a:pPr algn="l">
-              <a:defRPr sz="2400">
-                <a:solidFill>
-                  <a:srgbClr val="000000"/>
-                </a:solidFill>
-                <a:latin typeface="Helvetica Neue"/>
-                <a:ea typeface="Helvetica Neue"/>
-                <a:cs typeface="Helvetica Neue"/>
-              </a:defRPr>
-            </a:pPr>
-            <a:r>
+              <a:lnSpc>
+                <a:spcPct val="108000"/>
+              </a:lnSpc>
+              <a:buNone/>
+              <a:defRPr sz="1200" b="1">
+                <a:solidFill>
+                  <a:srgbClr val="000000"/>
+                </a:solidFill>
+                <a:latin typeface="Helvetica Neue"/>
+                <a:ea typeface="Helvetica Neue"/>
+                <a:cs typeface="Helvetica Neue"/>
+              </a:defRPr>
+            </a:pPr>
+            <a:r>
+              <a:rPr sz="1200" b="1">
+                <a:solidFill>
+                  <a:srgbClr val="000000"/>
+                </a:solidFill>
+                <a:latin typeface="Helvetica Neue"/>
+                <a:ea typeface="Helvetica Neue"/>
+                <a:cs typeface="Helvetica Neue"/>
+              </a:rPr>
               <a:t>MARKET SIGNAL</a:t>
             </a:r>
           </a:p>
@@ -5590,16 +5988,28 @@
           <a:lstStyle xmlns:a="http://schemas.openxmlformats.org/drawingml/2006/main"/>
           <a:p xmlns:a="http://schemas.openxmlformats.org/drawingml/2006/main">
             <a:pPr algn="l">
-              <a:defRPr sz="2400">
-                <a:solidFill>
-                  <a:srgbClr val="000000"/>
-                </a:solidFill>
-                <a:latin typeface="Helvetica Neue"/>
-                <a:ea typeface="Helvetica Neue"/>
-                <a:cs typeface="Helvetica Neue"/>
-              </a:defRPr>
-            </a:pPr>
-            <a:r>
+              <a:lnSpc>
+                <a:spcPct val="108000"/>
+              </a:lnSpc>
+              <a:buNone/>
+              <a:defRPr sz="1200" b="1">
+                <a:solidFill>
+                  <a:srgbClr val="000000"/>
+                </a:solidFill>
+                <a:latin typeface="Helvetica Neue"/>
+                <a:ea typeface="Helvetica Neue"/>
+                <a:cs typeface="Helvetica Neue"/>
+              </a:defRPr>
+            </a:pPr>
+            <a:r>
+              <a:rPr sz="1200" b="1">
+                <a:solidFill>
+                  <a:srgbClr val="000000"/>
+                </a:solidFill>
+                <a:latin typeface="Helvetica Neue"/>
+                <a:ea typeface="Helvetica Neue"/>
+                <a:cs typeface="Helvetica Neue"/>
+              </a:rPr>
               <a:t>EXAMPLE</a:t>
             </a:r>
           </a:p>
@@ -5635,16 +6045,28 @@
           <a:lstStyle xmlns:a="http://schemas.openxmlformats.org/drawingml/2006/main"/>
           <a:p xmlns:a="http://schemas.openxmlformats.org/drawingml/2006/main">
             <a:pPr algn="l">
-              <a:defRPr sz="2400">
-                <a:solidFill>
-                  <a:srgbClr val="000000"/>
-                </a:solidFill>
-                <a:latin typeface="Helvetica Neue"/>
-                <a:ea typeface="Helvetica Neue"/>
-                <a:cs typeface="Helvetica Neue"/>
-              </a:defRPr>
-            </a:pPr>
-            <a:r>
+              <a:lnSpc>
+                <a:spcPct val="108000"/>
+              </a:lnSpc>
+              <a:buNone/>
+              <a:defRPr sz="1200" b="1">
+                <a:solidFill>
+                  <a:srgbClr val="000000"/>
+                </a:solidFill>
+                <a:latin typeface="Helvetica Neue"/>
+                <a:ea typeface="Helvetica Neue"/>
+                <a:cs typeface="Helvetica Neue"/>
+              </a:defRPr>
+            </a:pPr>
+            <a:r>
+              <a:rPr sz="1200" b="1">
+                <a:solidFill>
+                  <a:srgbClr val="000000"/>
+                </a:solidFill>
+                <a:latin typeface="Helvetica Neue"/>
+                <a:ea typeface="Helvetica Neue"/>
+                <a:cs typeface="Helvetica Neue"/>
+              </a:rPr>
               <a:t>BOUNDARY</a:t>
             </a:r>
           </a:p>
@@ -5702,6 +6124,7 @@
           <a:lstStyle xmlns:a="http://schemas.openxmlformats.org/drawingml/2006/main"/>
           <a:p xmlns:a="http://schemas.openxmlformats.org/drawingml/2006/main">
             <a:pPr algn="l">
+              <a:buNone/>
               <a:defRPr sz="6000">
                 <a:solidFill>
                   <a:srgbClr val="000000"/>
@@ -5747,6 +6170,7 @@
           <a:lstStyle xmlns:a="http://schemas.openxmlformats.org/drawingml/2006/main"/>
           <a:p xmlns:a="http://schemas.openxmlformats.org/drawingml/2006/main">
             <a:pPr algn="l">
+              <a:buNone/>
               <a:defRPr sz="2400">
                 <a:solidFill>
                   <a:srgbClr val="000000"/>
@@ -5792,6 +6216,7 @@
           <a:lstStyle xmlns:a="http://schemas.openxmlformats.org/drawingml/2006/main"/>
           <a:p xmlns:a="http://schemas.openxmlformats.org/drawingml/2006/main">
             <a:pPr algn="l">
+              <a:buNone/>
               <a:defRPr sz="2400">
                 <a:solidFill>
                   <a:srgbClr val="000000"/>
@@ -5857,16 +6282,28 @@
           <a:lstStyle xmlns:a="http://schemas.openxmlformats.org/drawingml/2006/main"/>
           <a:p xmlns:a="http://schemas.openxmlformats.org/drawingml/2006/main">
             <a:pPr algn="r">
-              <a:defRPr sz="1000">
-                <a:solidFill>
-                  <a:srgbClr val="000000"/>
-                </a:solidFill>
-                <a:latin typeface="Helvetica Neue"/>
-                <a:ea typeface="Helvetica Neue"/>
-                <a:cs typeface="Helvetica Neue"/>
-              </a:defRPr>
-            </a:pPr>
-            <a:r>
+              <a:lnSpc>
+                <a:spcPct val="108000"/>
+              </a:lnSpc>
+              <a:buNone/>
+              <a:defRPr sz="1200" b="1">
+                <a:solidFill>
+                  <a:srgbClr val="000000"/>
+                </a:solidFill>
+                <a:latin typeface="Helvetica Neue"/>
+                <a:ea typeface="Helvetica Neue"/>
+                <a:cs typeface="Helvetica Neue"/>
+              </a:defRPr>
+            </a:pPr>
+            <a:r>
+              <a:rPr sz="1200" b="1">
+                <a:solidFill>
+                  <a:srgbClr val="000000"/>
+                </a:solidFill>
+                <a:latin typeface="Helvetica Neue"/>
+                <a:ea typeface="Helvetica Neue"/>
+                <a:cs typeface="Helvetica Neue"/>
+              </a:rPr>
               <a:t>11</a:t>
             </a:r>
           </a:p>
@@ -5902,16 +6339,28 @@
           <a:lstStyle xmlns:a="http://schemas.openxmlformats.org/drawingml/2006/main"/>
           <a:p xmlns:a="http://schemas.openxmlformats.org/drawingml/2006/main">
             <a:pPr algn="l">
-              <a:defRPr sz="2900">
-                <a:solidFill>
-                  <a:srgbClr val="000000"/>
-                </a:solidFill>
-                <a:latin typeface="Helvetica Neue"/>
-                <a:ea typeface="Helvetica Neue"/>
-                <a:cs typeface="Helvetica Neue"/>
-              </a:defRPr>
-            </a:pPr>
-            <a:r>
+              <a:lnSpc>
+                <a:spcPct val="98000"/>
+              </a:lnSpc>
+              <a:buNone/>
+              <a:defRPr sz="3375" b="1">
+                <a:solidFill>
+                  <a:srgbClr val="000000"/>
+                </a:solidFill>
+                <a:latin typeface="Helvetica Neue"/>
+                <a:ea typeface="Helvetica Neue"/>
+                <a:cs typeface="Helvetica Neue"/>
+              </a:defRPr>
+            </a:pPr>
+            <a:r>
+              <a:rPr sz="3375" b="1">
+                <a:solidFill>
+                  <a:srgbClr val="000000"/>
+                </a:solidFill>
+                <a:latin typeface="Helvetica Neue"/>
+                <a:ea typeface="Helvetica Neue"/>
+                <a:cs typeface="Helvetica Neue"/>
+              </a:rPr>
               <a:t>The existing lab is already extensive</a:t>
             </a:r>
           </a:p>
@@ -5945,31 +6394,55 @@
           <a:lstStyle xmlns:a="http://schemas.openxmlformats.org/drawingml/2006/main"/>
           <a:p xmlns:a="http://schemas.openxmlformats.org/drawingml/2006/main">
             <a:pPr algn="l">
-              <a:defRPr sz="2400">
-                <a:solidFill>
-                  <a:srgbClr val="000000"/>
-                </a:solidFill>
-                <a:latin typeface="Helvetica Neue"/>
-                <a:ea typeface="Helvetica Neue"/>
-                <a:cs typeface="Helvetica Neue"/>
-              </a:defRPr>
-            </a:pPr>
-            <a:r>
+              <a:lnSpc>
+                <a:spcPct val="114000"/>
+              </a:lnSpc>
+              <a:buNone/>
+              <a:defRPr sz="1500">
+                <a:solidFill>
+                  <a:srgbClr val="000000"/>
+                </a:solidFill>
+                <a:latin typeface="Helvetica Neue"/>
+                <a:ea typeface="Helvetica Neue"/>
+                <a:cs typeface="Helvetica Neue"/>
+              </a:defRPr>
+            </a:pPr>
+            <a:r>
+              <a:rPr sz="1500">
+                <a:solidFill>
+                  <a:srgbClr val="000000"/>
+                </a:solidFill>
+                <a:latin typeface="Helvetica Neue"/>
+                <a:ea typeface="Helvetica Neue"/>
+                <a:cs typeface="Helvetica Neue"/>
+              </a:rPr>
               <a:t>CONFIGURE</a:t>
             </a:r>
           </a:p>
           <a:p xmlns:a="http://schemas.openxmlformats.org/drawingml/2006/main">
             <a:pPr algn="l">
-              <a:defRPr sz="2400">
-                <a:solidFill>
-                  <a:srgbClr val="000000"/>
-                </a:solidFill>
-                <a:latin typeface="Helvetica Neue"/>
-                <a:ea typeface="Helvetica Neue"/>
-                <a:cs typeface="Helvetica Neue"/>
-              </a:defRPr>
-            </a:pPr>
-            <a:r>
+              <a:lnSpc>
+                <a:spcPct val="114000"/>
+              </a:lnSpc>
+              <a:buNone/>
+              <a:defRPr sz="1500">
+                <a:solidFill>
+                  <a:srgbClr val="000000"/>
+                </a:solidFill>
+                <a:latin typeface="Helvetica Neue"/>
+                <a:ea typeface="Helvetica Neue"/>
+                <a:cs typeface="Helvetica Neue"/>
+              </a:defRPr>
+            </a:pPr>
+            <a:r>
+              <a:rPr sz="1500">
+                <a:solidFill>
+                  <a:srgbClr val="000000"/>
+                </a:solidFill>
+                <a:latin typeface="Helvetica Neue"/>
+                <a:ea typeface="Helvetica Neue"/>
+                <a:cs typeface="Helvetica Neue"/>
+              </a:rPr>
               <a:t>Choose contestants, judges, prompts, repetitions, timeouts, weights, and finalists.</a:t>
             </a:r>
           </a:p>
@@ -6003,31 +6476,55 @@
           <a:lstStyle xmlns:a="http://schemas.openxmlformats.org/drawingml/2006/main"/>
           <a:p xmlns:a="http://schemas.openxmlformats.org/drawingml/2006/main">
             <a:pPr algn="l">
-              <a:defRPr sz="2400">
-                <a:solidFill>
-                  <a:srgbClr val="000000"/>
-                </a:solidFill>
-                <a:latin typeface="Helvetica Neue"/>
-                <a:ea typeface="Helvetica Neue"/>
-                <a:cs typeface="Helvetica Neue"/>
-              </a:defRPr>
-            </a:pPr>
-            <a:r>
+              <a:lnSpc>
+                <a:spcPct val="114000"/>
+              </a:lnSpc>
+              <a:buNone/>
+              <a:defRPr sz="1500">
+                <a:solidFill>
+                  <a:srgbClr val="000000"/>
+                </a:solidFill>
+                <a:latin typeface="Helvetica Neue"/>
+                <a:ea typeface="Helvetica Neue"/>
+                <a:cs typeface="Helvetica Neue"/>
+              </a:defRPr>
+            </a:pPr>
+            <a:r>
+              <a:rPr sz="1500">
+                <a:solidFill>
+                  <a:srgbClr val="000000"/>
+                </a:solidFill>
+                <a:latin typeface="Helvetica Neue"/>
+                <a:ea typeface="Helvetica Neue"/>
+                <a:cs typeface="Helvetica Neue"/>
+              </a:rPr>
               <a:t>RUN</a:t>
             </a:r>
           </a:p>
           <a:p xmlns:a="http://schemas.openxmlformats.org/drawingml/2006/main">
             <a:pPr algn="l">
-              <a:defRPr sz="2400">
-                <a:solidFill>
-                  <a:srgbClr val="000000"/>
-                </a:solidFill>
-                <a:latin typeface="Helvetica Neue"/>
-                <a:ea typeface="Helvetica Neue"/>
-                <a:cs typeface="Helvetica Neue"/>
-              </a:defRPr>
-            </a:pPr>
-            <a:r>
+              <a:lnSpc>
+                <a:spcPct val="114000"/>
+              </a:lnSpc>
+              <a:buNone/>
+              <a:defRPr sz="1500">
+                <a:solidFill>
+                  <a:srgbClr val="000000"/>
+                </a:solidFill>
+                <a:latin typeface="Helvetica Neue"/>
+                <a:ea typeface="Helvetica Neue"/>
+                <a:cs typeface="Helvetica Neue"/>
+              </a:defRPr>
+            </a:pPr>
+            <a:r>
+              <a:rPr sz="1500">
+                <a:solidFill>
+                  <a:srgbClr val="000000"/>
+                </a:solidFill>
+                <a:latin typeface="Helvetica Neue"/>
+                <a:ea typeface="Helvetica Neue"/>
+                <a:cs typeface="Helvetica Neue"/>
+              </a:rPr>
               <a:t>Pause, resume, subset, and preserve partial results.</a:t>
             </a:r>
           </a:p>
@@ -6063,31 +6560,55 @@
           <a:lstStyle xmlns:a="http://schemas.openxmlformats.org/drawingml/2006/main"/>
           <a:p xmlns:a="http://schemas.openxmlformats.org/drawingml/2006/main">
             <a:pPr algn="l">
-              <a:defRPr sz="2400">
-                <a:solidFill>
-                  <a:srgbClr val="000000"/>
-                </a:solidFill>
-                <a:latin typeface="Helvetica Neue"/>
-                <a:ea typeface="Helvetica Neue"/>
-                <a:cs typeface="Helvetica Neue"/>
-              </a:defRPr>
-            </a:pPr>
-            <a:r>
+              <a:lnSpc>
+                <a:spcPct val="114000"/>
+              </a:lnSpc>
+              <a:buNone/>
+              <a:defRPr sz="1500">
+                <a:solidFill>
+                  <a:srgbClr val="000000"/>
+                </a:solidFill>
+                <a:latin typeface="Helvetica Neue"/>
+                <a:ea typeface="Helvetica Neue"/>
+                <a:cs typeface="Helvetica Neue"/>
+              </a:defRPr>
+            </a:pPr>
+            <a:r>
+              <a:rPr sz="1500">
+                <a:solidFill>
+                  <a:srgbClr val="000000"/>
+                </a:solidFill>
+                <a:latin typeface="Helvetica Neue"/>
+                <a:ea typeface="Helvetica Neue"/>
+                <a:cs typeface="Helvetica Neue"/>
+              </a:rPr>
               <a:t>COMPARE</a:t>
             </a:r>
           </a:p>
           <a:p xmlns:a="http://schemas.openxmlformats.org/drawingml/2006/main">
             <a:pPr algn="l">
-              <a:defRPr sz="2400">
-                <a:solidFill>
-                  <a:srgbClr val="000000"/>
-                </a:solidFill>
-                <a:latin typeface="Helvetica Neue"/>
-                <a:ea typeface="Helvetica Neue"/>
-                <a:cs typeface="Helvetica Neue"/>
-              </a:defRPr>
-            </a:pPr>
-            <a:r>
+              <a:lnSpc>
+                <a:spcPct val="114000"/>
+              </a:lnSpc>
+              <a:buNone/>
+              <a:defRPr sz="1500">
+                <a:solidFill>
+                  <a:srgbClr val="000000"/>
+                </a:solidFill>
+                <a:latin typeface="Helvetica Neue"/>
+                <a:ea typeface="Helvetica Neue"/>
+                <a:cs typeface="Helvetica Neue"/>
+              </a:defRPr>
+            </a:pPr>
+            <a:r>
+              <a:rPr sz="1500">
+                <a:solidFill>
+                  <a:srgbClr val="000000"/>
+                </a:solidFill>
+                <a:latin typeface="Helvetica Neue"/>
+                <a:ea typeface="Helvetica Neue"/>
+                <a:cs typeface="Helvetica Neue"/>
+              </a:rPr>
               <a:t>Use quality, speed, consistency, and side-by-side ranking.</a:t>
             </a:r>
           </a:p>
@@ -6123,31 +6644,55 @@
           <a:lstStyle xmlns:a="http://schemas.openxmlformats.org/drawingml/2006/main"/>
           <a:p xmlns:a="http://schemas.openxmlformats.org/drawingml/2006/main">
             <a:pPr algn="l">
-              <a:defRPr sz="2400">
-                <a:solidFill>
-                  <a:srgbClr val="000000"/>
-                </a:solidFill>
-                <a:latin typeface="Helvetica Neue"/>
-                <a:ea typeface="Helvetica Neue"/>
-                <a:cs typeface="Helvetica Neue"/>
-              </a:defRPr>
-            </a:pPr>
-            <a:r>
+              <a:lnSpc>
+                <a:spcPct val="114000"/>
+              </a:lnSpc>
+              <a:buNone/>
+              <a:defRPr sz="1500">
+                <a:solidFill>
+                  <a:srgbClr val="000000"/>
+                </a:solidFill>
+                <a:latin typeface="Helvetica Neue"/>
+                <a:ea typeface="Helvetica Neue"/>
+                <a:cs typeface="Helvetica Neue"/>
+              </a:defRPr>
+            </a:pPr>
+            <a:r>
+              <a:rPr sz="1500">
+                <a:solidFill>
+                  <a:srgbClr val="000000"/>
+                </a:solidFill>
+                <a:latin typeface="Helvetica Neue"/>
+                <a:ea typeface="Helvetica Neue"/>
+                <a:cs typeface="Helvetica Neue"/>
+              </a:rPr>
               <a:t>INSPECT</a:t>
             </a:r>
           </a:p>
           <a:p xmlns:a="http://schemas.openxmlformats.org/drawingml/2006/main">
             <a:pPr algn="l">
-              <a:defRPr sz="2400">
-                <a:solidFill>
-                  <a:srgbClr val="000000"/>
-                </a:solidFill>
-                <a:latin typeface="Helvetica Neue"/>
-                <a:ea typeface="Helvetica Neue"/>
-                <a:cs typeface="Helvetica Neue"/>
-              </a:defRPr>
-            </a:pPr>
-            <a:r>
+              <a:lnSpc>
+                <a:spcPct val="114000"/>
+              </a:lnSpc>
+              <a:buNone/>
+              <a:defRPr sz="1500">
+                <a:solidFill>
+                  <a:srgbClr val="000000"/>
+                </a:solidFill>
+                <a:latin typeface="Helvetica Neue"/>
+                <a:ea typeface="Helvetica Neue"/>
+                <a:cs typeface="Helvetica Neue"/>
+              </a:defRPr>
+            </a:pPr>
+            <a:r>
+              <a:rPr sz="1500">
+                <a:solidFill>
+                  <a:srgbClr val="000000"/>
+                </a:solidFill>
+                <a:latin typeface="Helvetica Neue"/>
+                <a:ea typeface="Helvetica Neue"/>
+                <a:cs typeface="Helvetica Neue"/>
+              </a:rPr>
               <a:t>Open raw responses and every judge’s commentary.</a:t>
             </a:r>
           </a:p>
@@ -6205,6 +6750,7 @@
           <a:lstStyle xmlns:a="http://schemas.openxmlformats.org/drawingml/2006/main"/>
           <a:p xmlns:a="http://schemas.openxmlformats.org/drawingml/2006/main">
             <a:pPr algn="r">
+              <a:buNone/>
               <a:defRPr sz="1000">
                 <a:solidFill>
                   <a:srgbClr val="000000"/>
@@ -6250,6 +6796,7 @@
           <a:lstStyle xmlns:a="http://schemas.openxmlformats.org/drawingml/2006/main"/>
           <a:p xmlns:a="http://schemas.openxmlformats.org/drawingml/2006/main">
             <a:pPr algn="l">
+              <a:buNone/>
               <a:defRPr sz="2900">
                 <a:solidFill>
                   <a:srgbClr val="000000"/>
@@ -6295,6 +6842,7 @@
           <a:lstStyle xmlns:a="http://schemas.openxmlformats.org/drawingml/2006/main"/>
           <a:p xmlns:a="http://schemas.openxmlformats.org/drawingml/2006/main">
             <a:pPr algn="l">
+              <a:buNone/>
               <a:defRPr sz="2400">
                 <a:solidFill>
                   <a:srgbClr val="000000"/>
@@ -6310,6 +6858,7 @@
           </a:p>
           <a:p xmlns:a="http://schemas.openxmlformats.org/drawingml/2006/main">
             <a:pPr algn="l">
+              <a:buNone/>
               <a:defRPr sz="2400">
                 <a:solidFill>
                   <a:srgbClr val="000000"/>
@@ -6355,6 +6904,7 @@
           <a:lstStyle xmlns:a="http://schemas.openxmlformats.org/drawingml/2006/main"/>
           <a:p xmlns:a="http://schemas.openxmlformats.org/drawingml/2006/main">
             <a:pPr algn="l">
+              <a:buNone/>
               <a:defRPr sz="2400">
                 <a:solidFill>
                   <a:srgbClr val="000000"/>
@@ -6370,6 +6920,7 @@
           </a:p>
           <a:p xmlns:a="http://schemas.openxmlformats.org/drawingml/2006/main">
             <a:pPr algn="l">
+              <a:buNone/>
               <a:defRPr sz="2400">
                 <a:solidFill>
                   <a:srgbClr val="000000"/>
@@ -6415,6 +6966,7 @@
           <a:lstStyle xmlns:a="http://schemas.openxmlformats.org/drawingml/2006/main"/>
           <a:p xmlns:a="http://schemas.openxmlformats.org/drawingml/2006/main">
             <a:pPr algn="l">
+              <a:buNone/>
               <a:defRPr sz="2400">
                 <a:solidFill>
                   <a:srgbClr val="000000"/>
@@ -6430,6 +6982,7 @@
           </a:p>
           <a:p xmlns:a="http://schemas.openxmlformats.org/drawingml/2006/main">
             <a:pPr algn="l">
+              <a:buNone/>
               <a:defRPr sz="2400">
                 <a:solidFill>
                   <a:srgbClr val="000000"/>
@@ -6497,16 +7050,28 @@
           <a:lstStyle xmlns:a="http://schemas.openxmlformats.org/drawingml/2006/main"/>
           <a:p xmlns:a="http://schemas.openxmlformats.org/drawingml/2006/main">
             <a:pPr algn="l">
-              <a:defRPr sz="6000">
-                <a:solidFill>
-                  <a:srgbClr val="000000"/>
-                </a:solidFill>
-                <a:latin typeface="Helvetica Neue"/>
-                <a:ea typeface="Helvetica Neue"/>
-                <a:cs typeface="Helvetica Neue"/>
-              </a:defRPr>
-            </a:pPr>
-            <a:r>
+              <a:lnSpc>
+                <a:spcPct val="98000"/>
+              </a:lnSpc>
+              <a:buNone/>
+              <a:defRPr sz="3600" b="1">
+                <a:solidFill>
+                  <a:srgbClr val="000000"/>
+                </a:solidFill>
+                <a:latin typeface="Helvetica Neue"/>
+                <a:ea typeface="Helvetica Neue"/>
+                <a:cs typeface="Helvetica Neue"/>
+              </a:defRPr>
+            </a:pPr>
+            <a:r>
+              <a:rPr sz="3600" b="1">
+                <a:solidFill>
+                  <a:srgbClr val="000000"/>
+                </a:solidFill>
+                <a:latin typeface="Helvetica Neue"/>
+                <a:ea typeface="Helvetica Neue"/>
+                <a:cs typeface="Helvetica Neue"/>
+              </a:rPr>
               <a:t>Which model is good enough
 for this work—and how do we know?</a:t>
             </a:r>
@@ -6543,6 +7108,7 @@
           <a:lstStyle xmlns:a="http://schemas.openxmlformats.org/drawingml/2006/main"/>
           <a:p xmlns:a="http://schemas.openxmlformats.org/drawingml/2006/main">
             <a:pPr algn="l">
+              <a:buNone/>
               <a:defRPr sz="2400">
                 <a:solidFill>
                   <a:srgbClr val="000000"/>
@@ -6588,6 +7154,7 @@
           <a:lstStyle xmlns:a="http://schemas.openxmlformats.org/drawingml/2006/main"/>
           <a:p xmlns:a="http://schemas.openxmlformats.org/drawingml/2006/main">
             <a:pPr algn="l">
+              <a:buNone/>
               <a:defRPr sz="2400">
                 <a:solidFill>
                   <a:srgbClr val="000000"/>
@@ -6653,16 +7220,28 @@
           <a:lstStyle xmlns:a="http://schemas.openxmlformats.org/drawingml/2006/main"/>
           <a:p xmlns:a="http://schemas.openxmlformats.org/drawingml/2006/main">
             <a:pPr algn="r">
-              <a:defRPr sz="1000">
-                <a:solidFill>
-                  <a:srgbClr val="000000"/>
-                </a:solidFill>
-                <a:latin typeface="Helvetica Neue"/>
-                <a:ea typeface="Helvetica Neue"/>
-                <a:cs typeface="Helvetica Neue"/>
-              </a:defRPr>
-            </a:pPr>
-            <a:r>
+              <a:lnSpc>
+                <a:spcPct val="108000"/>
+              </a:lnSpc>
+              <a:buNone/>
+              <a:defRPr sz="1200" b="1">
+                <a:solidFill>
+                  <a:srgbClr val="000000"/>
+                </a:solidFill>
+                <a:latin typeface="Helvetica Neue"/>
+                <a:ea typeface="Helvetica Neue"/>
+                <a:cs typeface="Helvetica Neue"/>
+              </a:defRPr>
+            </a:pPr>
+            <a:r>
+              <a:rPr sz="1200" b="1">
+                <a:solidFill>
+                  <a:srgbClr val="000000"/>
+                </a:solidFill>
+                <a:latin typeface="Helvetica Neue"/>
+                <a:ea typeface="Helvetica Neue"/>
+                <a:cs typeface="Helvetica Neue"/>
+              </a:rPr>
               <a:t>13</a:t>
             </a:r>
           </a:p>
@@ -6698,16 +7277,28 @@
           <a:lstStyle xmlns:a="http://schemas.openxmlformats.org/drawingml/2006/main"/>
           <a:p xmlns:a="http://schemas.openxmlformats.org/drawingml/2006/main">
             <a:pPr algn="l">
-              <a:defRPr sz="2900">
-                <a:solidFill>
-                  <a:srgbClr val="000000"/>
-                </a:solidFill>
-                <a:latin typeface="Helvetica Neue"/>
-                <a:ea typeface="Helvetica Neue"/>
-                <a:cs typeface="Helvetica Neue"/>
-              </a:defRPr>
-            </a:pPr>
-            <a:r>
+              <a:lnSpc>
+                <a:spcPct val="98000"/>
+              </a:lnSpc>
+              <a:buNone/>
+              <a:defRPr sz="3375" b="1">
+                <a:solidFill>
+                  <a:srgbClr val="000000"/>
+                </a:solidFill>
+                <a:latin typeface="Helvetica Neue"/>
+                <a:ea typeface="Helvetica Neue"/>
+                <a:cs typeface="Helvetica Neue"/>
+              </a:defRPr>
+            </a:pPr>
+            <a:r>
+              <a:rPr sz="3375" b="1">
+                <a:solidFill>
+                  <a:srgbClr val="000000"/>
+                </a:solidFill>
+                <a:latin typeface="Helvetica Neue"/>
+                <a:ea typeface="Helvetica Neue"/>
+                <a:cs typeface="Helvetica Neue"/>
+              </a:rPr>
               <a:t>Repeated runs reveal more than a single score</a:t>
             </a:r>
           </a:p>
@@ -6715,7 +7306,7 @@
       </p:sp>
       <p:cxnSp>
         <p:nvCxnSpPr>
-          <p:cNvPr id="18" name="Google-Shape-2259-p159-4"/>
+          <p:cNvPr id="27" name="Google-Shape-2259-p159-4"/>
           <p:cNvCxnSpPr/>
           <p:nvPr/>
         </p:nvCxnSpPr>
@@ -6875,31 +7466,55 @@
           <a:lstStyle xmlns:a="http://schemas.openxmlformats.org/drawingml/2006/main"/>
           <a:p xmlns:a="http://schemas.openxmlformats.org/drawingml/2006/main">
             <a:pPr algn="l">
-              <a:defRPr sz="1600">
-                <a:solidFill>
-                  <a:srgbClr val="000000"/>
-                </a:solidFill>
-                <a:latin typeface="Helvetica Neue"/>
-                <a:ea typeface="Helvetica Neue"/>
-                <a:cs typeface="Helvetica Neue"/>
-              </a:defRPr>
-            </a:pPr>
-            <a:r>
+              <a:lnSpc>
+                <a:spcPct val="114000"/>
+              </a:lnSpc>
+              <a:buNone/>
+              <a:defRPr sz="1350">
+                <a:solidFill>
+                  <a:srgbClr val="000000"/>
+                </a:solidFill>
+                <a:latin typeface="Helvetica Neue"/>
+                <a:ea typeface="Helvetica Neue"/>
+                <a:cs typeface="Helvetica Neue"/>
+              </a:defRPr>
+            </a:pPr>
+            <a:r>
+              <a:rPr sz="1350">
+                <a:solidFill>
+                  <a:srgbClr val="000000"/>
+                </a:solidFill>
+                <a:latin typeface="Helvetica Neue"/>
+                <a:ea typeface="Helvetica Neue"/>
+                <a:cs typeface="Helvetica Neue"/>
+              </a:rPr>
               <a:t>BEST OF N</a:t>
             </a:r>
           </a:p>
           <a:p xmlns:a="http://schemas.openxmlformats.org/drawingml/2006/main">
             <a:pPr algn="l">
-              <a:defRPr sz="1600">
-                <a:solidFill>
-                  <a:srgbClr val="000000"/>
-                </a:solidFill>
-                <a:latin typeface="Helvetica Neue"/>
-                <a:ea typeface="Helvetica Neue"/>
-                <a:cs typeface="Helvetica Neue"/>
-              </a:defRPr>
-            </a:pPr>
-            <a:r>
+              <a:lnSpc>
+                <a:spcPct val="114000"/>
+              </a:lnSpc>
+              <a:buNone/>
+              <a:defRPr sz="1350">
+                <a:solidFill>
+                  <a:srgbClr val="000000"/>
+                </a:solidFill>
+                <a:latin typeface="Helvetica Neue"/>
+                <a:ea typeface="Helvetica Neue"/>
+                <a:cs typeface="Helvetica Neue"/>
+              </a:defRPr>
+            </a:pPr>
+            <a:r>
+              <a:rPr sz="1350">
+                <a:solidFill>
+                  <a:srgbClr val="000000"/>
+                </a:solidFill>
+                <a:latin typeface="Helvetica Neue"/>
+                <a:ea typeface="Helvetica Neue"/>
+                <a:cs typeface="Helvetica Neue"/>
+              </a:rPr>
               <a:t>Shows the model’s observed ceiling on this task.</a:t>
             </a:r>
           </a:p>
@@ -6964,31 +7579,55 @@
           <a:lstStyle xmlns:a="http://schemas.openxmlformats.org/drawingml/2006/main"/>
           <a:p xmlns:a="http://schemas.openxmlformats.org/drawingml/2006/main">
             <a:pPr algn="l">
-              <a:defRPr sz="1600">
-                <a:solidFill>
-                  <a:srgbClr val="000000"/>
-                </a:solidFill>
-                <a:latin typeface="Helvetica Neue"/>
-                <a:ea typeface="Helvetica Neue"/>
-                <a:cs typeface="Helvetica Neue"/>
-              </a:defRPr>
-            </a:pPr>
-            <a:r>
+              <a:lnSpc>
+                <a:spcPct val="114000"/>
+              </a:lnSpc>
+              <a:buNone/>
+              <a:defRPr sz="1350">
+                <a:solidFill>
+                  <a:srgbClr val="000000"/>
+                </a:solidFill>
+                <a:latin typeface="Helvetica Neue"/>
+                <a:ea typeface="Helvetica Neue"/>
+                <a:cs typeface="Helvetica Neue"/>
+              </a:defRPr>
+            </a:pPr>
+            <a:r>
+              <a:rPr sz="1350">
+                <a:solidFill>
+                  <a:srgbClr val="000000"/>
+                </a:solidFill>
+                <a:latin typeface="Helvetica Neue"/>
+                <a:ea typeface="Helvetica Neue"/>
+                <a:cs typeface="Helvetica Neue"/>
+              </a:rPr>
               <a:t>AVERAGE OF N</a:t>
             </a:r>
           </a:p>
           <a:p xmlns:a="http://schemas.openxmlformats.org/drawingml/2006/main">
             <a:pPr algn="l">
-              <a:defRPr sz="1600">
-                <a:solidFill>
-                  <a:srgbClr val="000000"/>
-                </a:solidFill>
-                <a:latin typeface="Helvetica Neue"/>
-                <a:ea typeface="Helvetica Neue"/>
-                <a:cs typeface="Helvetica Neue"/>
-              </a:defRPr>
-            </a:pPr>
-            <a:r>
+              <a:lnSpc>
+                <a:spcPct val="114000"/>
+              </a:lnSpc>
+              <a:buNone/>
+              <a:defRPr sz="1350">
+                <a:solidFill>
+                  <a:srgbClr val="000000"/>
+                </a:solidFill>
+                <a:latin typeface="Helvetica Neue"/>
+                <a:ea typeface="Helvetica Neue"/>
+                <a:cs typeface="Helvetica Neue"/>
+              </a:defRPr>
+            </a:pPr>
+            <a:r>
+              <a:rPr sz="1350">
+                <a:solidFill>
+                  <a:srgbClr val="000000"/>
+                </a:solidFill>
+                <a:latin typeface="Helvetica Neue"/>
+                <a:ea typeface="Helvetica Neue"/>
+                <a:cs typeface="Helvetica Neue"/>
+              </a:rPr>
               <a:t>Shows typical performance across the selected runs.</a:t>
             </a:r>
           </a:p>
@@ -7053,31 +7692,55 @@
           <a:lstStyle xmlns:a="http://schemas.openxmlformats.org/drawingml/2006/main"/>
           <a:p xmlns:a="http://schemas.openxmlformats.org/drawingml/2006/main">
             <a:pPr algn="l">
-              <a:defRPr sz="1600">
-                <a:solidFill>
-                  <a:srgbClr val="000000"/>
-                </a:solidFill>
-                <a:latin typeface="Helvetica Neue"/>
-                <a:ea typeface="Helvetica Neue"/>
-                <a:cs typeface="Helvetica Neue"/>
-              </a:defRPr>
-            </a:pPr>
-            <a:r>
+              <a:lnSpc>
+                <a:spcPct val="114000"/>
+              </a:lnSpc>
+              <a:buNone/>
+              <a:defRPr sz="1350">
+                <a:solidFill>
+                  <a:srgbClr val="000000"/>
+                </a:solidFill>
+                <a:latin typeface="Helvetica Neue"/>
+                <a:ea typeface="Helvetica Neue"/>
+                <a:cs typeface="Helvetica Neue"/>
+              </a:defRPr>
+            </a:pPr>
+            <a:r>
+              <a:rPr sz="1350">
+                <a:solidFill>
+                  <a:srgbClr val="000000"/>
+                </a:solidFill>
+                <a:latin typeface="Helvetica Neue"/>
+                <a:ea typeface="Helvetica Neue"/>
+                <a:cs typeface="Helvetica Neue"/>
+              </a:rPr>
               <a:t>CONSISTENCY</a:t>
             </a:r>
           </a:p>
           <a:p xmlns:a="http://schemas.openxmlformats.org/drawingml/2006/main">
             <a:pPr algn="l">
-              <a:defRPr sz="1600">
-                <a:solidFill>
-                  <a:srgbClr val="000000"/>
-                </a:solidFill>
-                <a:latin typeface="Helvetica Neue"/>
-                <a:ea typeface="Helvetica Neue"/>
-                <a:cs typeface="Helvetica Neue"/>
-              </a:defRPr>
-            </a:pPr>
-            <a:r>
+              <a:lnSpc>
+                <a:spcPct val="114000"/>
+              </a:lnSpc>
+              <a:buNone/>
+              <a:defRPr sz="1350">
+                <a:solidFill>
+                  <a:srgbClr val="000000"/>
+                </a:solidFill>
+                <a:latin typeface="Helvetica Neue"/>
+                <a:ea typeface="Helvetica Neue"/>
+                <a:cs typeface="Helvetica Neue"/>
+              </a:defRPr>
+            </a:pPr>
+            <a:r>
+              <a:rPr sz="1350">
+                <a:solidFill>
+                  <a:srgbClr val="000000"/>
+                </a:solidFill>
+                <a:latin typeface="Helvetica Neue"/>
+                <a:ea typeface="Helvetica Neue"/>
+                <a:cs typeface="Helvetica Neue"/>
+              </a:rPr>
               <a:t>Shows whether a seemingly strong result is dependable.</a:t>
             </a:r>
           </a:p>
@@ -7113,16 +7776,28 @@
           <a:lstStyle xmlns:a="http://schemas.openxmlformats.org/drawingml/2006/main"/>
           <a:p xmlns:a="http://schemas.openxmlformats.org/drawingml/2006/main">
             <a:pPr algn="l">
-              <a:defRPr sz="2400">
-                <a:solidFill>
-                  <a:srgbClr val="000000"/>
-                </a:solidFill>
-                <a:latin typeface="Helvetica Neue"/>
-                <a:ea typeface="Helvetica Neue"/>
-                <a:cs typeface="Helvetica Neue"/>
-              </a:defRPr>
-            </a:pPr>
-            <a:r>
+              <a:lnSpc>
+                <a:spcPct val="108000"/>
+              </a:lnSpc>
+              <a:buNone/>
+              <a:defRPr sz="1200" b="1">
+                <a:solidFill>
+                  <a:srgbClr val="000000"/>
+                </a:solidFill>
+                <a:latin typeface="Helvetica Neue"/>
+                <a:ea typeface="Helvetica Neue"/>
+                <a:cs typeface="Helvetica Neue"/>
+              </a:defRPr>
+            </a:pPr>
+            <a:r>
+              <a:rPr sz="1200" b="1">
+                <a:solidFill>
+                  <a:srgbClr val="000000"/>
+                </a:solidFill>
+                <a:latin typeface="Helvetica Neue"/>
+                <a:ea typeface="Helvetica Neue"/>
+                <a:cs typeface="Helvetica Neue"/>
+              </a:rPr>
               <a:t>EXPECTATION</a:t>
             </a:r>
           </a:p>
@@ -7158,16 +7833,28 @@
           <a:lstStyle xmlns:a="http://schemas.openxmlformats.org/drawingml/2006/main"/>
           <a:p xmlns:a="http://schemas.openxmlformats.org/drawingml/2006/main">
             <a:pPr algn="l">
-              <a:defRPr sz="2400">
-                <a:solidFill>
-                  <a:srgbClr val="000000"/>
-                </a:solidFill>
-                <a:latin typeface="Helvetica Neue"/>
-                <a:ea typeface="Helvetica Neue"/>
-                <a:cs typeface="Helvetica Neue"/>
-              </a:defRPr>
-            </a:pPr>
-            <a:r>
+              <a:lnSpc>
+                <a:spcPct val="108000"/>
+              </a:lnSpc>
+              <a:buNone/>
+              <a:defRPr sz="1200" b="1">
+                <a:solidFill>
+                  <a:srgbClr val="000000"/>
+                </a:solidFill>
+                <a:latin typeface="Helvetica Neue"/>
+                <a:ea typeface="Helvetica Neue"/>
+                <a:cs typeface="Helvetica Neue"/>
+              </a:defRPr>
+            </a:pPr>
+            <a:r>
+              <a:rPr sz="1200" b="1">
+                <a:solidFill>
+                  <a:srgbClr val="000000"/>
+                </a:solidFill>
+                <a:latin typeface="Helvetica Neue"/>
+                <a:ea typeface="Helvetica Neue"/>
+                <a:cs typeface="Helvetica Neue"/>
+              </a:rPr>
               <a:t>CEILING</a:t>
             </a:r>
           </a:p>
@@ -7203,16 +7890,28 @@
           <a:lstStyle xmlns:a="http://schemas.openxmlformats.org/drawingml/2006/main"/>
           <a:p xmlns:a="http://schemas.openxmlformats.org/drawingml/2006/main">
             <a:pPr algn="l">
-              <a:defRPr sz="2400">
-                <a:solidFill>
-                  <a:srgbClr val="000000"/>
-                </a:solidFill>
-                <a:latin typeface="Helvetica Neue"/>
-                <a:ea typeface="Helvetica Neue"/>
-                <a:cs typeface="Helvetica Neue"/>
-              </a:defRPr>
-            </a:pPr>
-            <a:r>
+              <a:lnSpc>
+                <a:spcPct val="108000"/>
+              </a:lnSpc>
+              <a:buNone/>
+              <a:defRPr sz="1200" b="1">
+                <a:solidFill>
+                  <a:srgbClr val="000000"/>
+                </a:solidFill>
+                <a:latin typeface="Helvetica Neue"/>
+                <a:ea typeface="Helvetica Neue"/>
+                <a:cs typeface="Helvetica Neue"/>
+              </a:defRPr>
+            </a:pPr>
+            <a:r>
+              <a:rPr sz="1200" b="1">
+                <a:solidFill>
+                  <a:srgbClr val="000000"/>
+                </a:solidFill>
+                <a:latin typeface="Helvetica Neue"/>
+                <a:ea typeface="Helvetica Neue"/>
+                <a:cs typeface="Helvetica Neue"/>
+              </a:rPr>
               <a:t>RELIABILITY</a:t>
             </a:r>
           </a:p>
@@ -7268,6 +7967,7 @@
           <a:lstStyle xmlns:a="http://schemas.openxmlformats.org/drawingml/2006/main"/>
           <a:p xmlns:a="http://schemas.openxmlformats.org/drawingml/2006/main">
             <a:pPr algn="r">
+              <a:buNone/>
               <a:defRPr sz="1000">
                 <a:solidFill>
                   <a:srgbClr val="000000"/>
@@ -7313,6 +8013,7 @@
           <a:lstStyle xmlns:a="http://schemas.openxmlformats.org/drawingml/2006/main"/>
           <a:p xmlns:a="http://schemas.openxmlformats.org/drawingml/2006/main">
             <a:pPr algn="l">
+              <a:buNone/>
               <a:defRPr sz="2900">
                 <a:solidFill>
                   <a:srgbClr val="000000"/>
@@ -7356,6 +8057,7 @@
           <a:lstStyle xmlns:a="http://schemas.openxmlformats.org/drawingml/2006/main"/>
           <a:p xmlns:a="http://schemas.openxmlformats.org/drawingml/2006/main">
             <a:pPr algn="l">
+              <a:buNone/>
               <a:defRPr sz="2400">
                 <a:solidFill>
                   <a:srgbClr val="000000"/>
@@ -7371,6 +8073,7 @@
           </a:p>
           <a:p xmlns:a="http://schemas.openxmlformats.org/drawingml/2006/main">
             <a:pPr algn="l">
+              <a:buNone/>
               <a:defRPr sz="2400">
                 <a:solidFill>
                   <a:srgbClr val="000000"/>
@@ -7414,6 +8117,7 @@
           <a:lstStyle xmlns:a="http://schemas.openxmlformats.org/drawingml/2006/main"/>
           <a:p xmlns:a="http://schemas.openxmlformats.org/drawingml/2006/main">
             <a:pPr algn="l">
+              <a:buNone/>
               <a:defRPr sz="2400">
                 <a:solidFill>
                   <a:srgbClr val="000000"/>
@@ -7429,6 +8133,7 @@
           </a:p>
           <a:p xmlns:a="http://schemas.openxmlformats.org/drawingml/2006/main">
             <a:pPr algn="l">
+              <a:buNone/>
               <a:defRPr sz="2400">
                 <a:solidFill>
                   <a:srgbClr val="000000"/>
@@ -7474,6 +8179,7 @@
           <a:lstStyle xmlns:a="http://schemas.openxmlformats.org/drawingml/2006/main"/>
           <a:p xmlns:a="http://schemas.openxmlformats.org/drawingml/2006/main">
             <a:pPr algn="l">
+              <a:buNone/>
               <a:defRPr sz="2400">
                 <a:solidFill>
                   <a:srgbClr val="000000"/>
@@ -7489,6 +8195,7 @@
           </a:p>
           <a:p xmlns:a="http://schemas.openxmlformats.org/drawingml/2006/main">
             <a:pPr algn="l">
+              <a:buNone/>
               <a:defRPr sz="2400">
                 <a:solidFill>
                   <a:srgbClr val="000000"/>
@@ -7534,6 +8241,7 @@
           <a:lstStyle xmlns:a="http://schemas.openxmlformats.org/drawingml/2006/main"/>
           <a:p xmlns:a="http://schemas.openxmlformats.org/drawingml/2006/main">
             <a:pPr algn="l">
+              <a:buNone/>
               <a:defRPr sz="2400">
                 <a:solidFill>
                   <a:srgbClr val="000000"/>
@@ -7549,6 +8257,7 @@
           </a:p>
           <a:p xmlns:a="http://schemas.openxmlformats.org/drawingml/2006/main">
             <a:pPr algn="l">
+              <a:buNone/>
               <a:defRPr sz="2400">
                 <a:solidFill>
                   <a:srgbClr val="000000"/>
@@ -7616,16 +8325,28 @@
           <a:lstStyle xmlns:a="http://schemas.openxmlformats.org/drawingml/2006/main"/>
           <a:p xmlns:a="http://schemas.openxmlformats.org/drawingml/2006/main">
             <a:pPr algn="r">
-              <a:defRPr sz="1000">
-                <a:solidFill>
-                  <a:srgbClr val="000000"/>
-                </a:solidFill>
-                <a:latin typeface="Helvetica Neue"/>
-                <a:ea typeface="Helvetica Neue"/>
-                <a:cs typeface="Helvetica Neue"/>
-              </a:defRPr>
-            </a:pPr>
-            <a:r>
+              <a:lnSpc>
+                <a:spcPct val="108000"/>
+              </a:lnSpc>
+              <a:buNone/>
+              <a:defRPr sz="1200" b="1">
+                <a:solidFill>
+                  <a:srgbClr val="000000"/>
+                </a:solidFill>
+                <a:latin typeface="Helvetica Neue"/>
+                <a:ea typeface="Helvetica Neue"/>
+                <a:cs typeface="Helvetica Neue"/>
+              </a:defRPr>
+            </a:pPr>
+            <a:r>
+              <a:rPr sz="1200" b="1">
+                <a:solidFill>
+                  <a:srgbClr val="000000"/>
+                </a:solidFill>
+                <a:latin typeface="Helvetica Neue"/>
+                <a:ea typeface="Helvetica Neue"/>
+                <a:cs typeface="Helvetica Neue"/>
+              </a:rPr>
               <a:t>15</a:t>
             </a:r>
           </a:p>
@@ -7661,16 +8382,28 @@
           <a:lstStyle xmlns:a="http://schemas.openxmlformats.org/drawingml/2006/main"/>
           <a:p xmlns:a="http://schemas.openxmlformats.org/drawingml/2006/main">
             <a:pPr algn="l">
-              <a:defRPr sz="2900">
-                <a:solidFill>
-                  <a:srgbClr val="000000"/>
-                </a:solidFill>
-                <a:latin typeface="Helvetica Neue"/>
-                <a:ea typeface="Helvetica Neue"/>
-                <a:cs typeface="Helvetica Neue"/>
-              </a:defRPr>
-            </a:pPr>
-            <a:r>
+              <a:lnSpc>
+                <a:spcPct val="98000"/>
+              </a:lnSpc>
+              <a:buNone/>
+              <a:defRPr sz="3375" b="1">
+                <a:solidFill>
+                  <a:srgbClr val="000000"/>
+                </a:solidFill>
+                <a:latin typeface="Helvetica Neue"/>
+                <a:ea typeface="Helvetica Neue"/>
+                <a:cs typeface="Helvetica Neue"/>
+              </a:defRPr>
+            </a:pPr>
+            <a:r>
+              <a:rPr sz="3375" b="1">
+                <a:solidFill>
+                  <a:srgbClr val="000000"/>
+                </a:solidFill>
+                <a:latin typeface="Helvetica Neue"/>
+                <a:ea typeface="Helvetica Neue"/>
+                <a:cs typeface="Helvetica Neue"/>
+              </a:rPr>
               <a:t>Multiple judges help—but agreement is not truth</a:t>
             </a:r>
           </a:p>
@@ -7706,31 +8439,55 @@
           <a:lstStyle xmlns:a="http://schemas.openxmlformats.org/drawingml/2006/main"/>
           <a:p xmlns:a="http://schemas.openxmlformats.org/drawingml/2006/main">
             <a:pPr algn="l">
-              <a:defRPr sz="2400">
-                <a:solidFill>
-                  <a:srgbClr val="000000"/>
-                </a:solidFill>
-                <a:latin typeface="Helvetica Neue"/>
-                <a:ea typeface="Helvetica Neue"/>
-                <a:cs typeface="Helvetica Neue"/>
-              </a:defRPr>
-            </a:pPr>
-            <a:r>
+              <a:lnSpc>
+                <a:spcPct val="106000"/>
+              </a:lnSpc>
+              <a:buNone/>
+              <a:defRPr sz="1425" b="1">
+                <a:solidFill>
+                  <a:srgbClr val="000000"/>
+                </a:solidFill>
+                <a:latin typeface="Helvetica Neue"/>
+                <a:ea typeface="Helvetica Neue"/>
+                <a:cs typeface="Helvetica Neue"/>
+              </a:defRPr>
+            </a:pPr>
+            <a:r>
+              <a:rPr sz="1425" b="1">
+                <a:solidFill>
+                  <a:srgbClr val="000000"/>
+                </a:solidFill>
+                <a:latin typeface="Helvetica Neue"/>
+                <a:ea typeface="Helvetica Neue"/>
+                <a:cs typeface="Helvetica Neue"/>
+              </a:rPr>
               <a:t>DIVERSITY</a:t>
             </a:r>
           </a:p>
           <a:p xmlns:a="http://schemas.openxmlformats.org/drawingml/2006/main">
             <a:pPr algn="l">
-              <a:defRPr sz="2400">
-                <a:solidFill>
-                  <a:srgbClr val="000000"/>
-                </a:solidFill>
-                <a:latin typeface="Helvetica Neue"/>
-                <a:ea typeface="Helvetica Neue"/>
-                <a:cs typeface="Helvetica Neue"/>
-              </a:defRPr>
-            </a:pPr>
-            <a:r>
+              <a:lnSpc>
+                <a:spcPct val="106000"/>
+              </a:lnSpc>
+              <a:buNone/>
+              <a:defRPr sz="1425" b="1">
+                <a:solidFill>
+                  <a:srgbClr val="000000"/>
+                </a:solidFill>
+                <a:latin typeface="Helvetica Neue"/>
+                <a:ea typeface="Helvetica Neue"/>
+                <a:cs typeface="Helvetica Neue"/>
+              </a:defRPr>
+            </a:pPr>
+            <a:r>
+              <a:rPr sz="1425" b="1">
+                <a:solidFill>
+                  <a:srgbClr val="000000"/>
+                </a:solidFill>
+                <a:latin typeface="Helvetica Neue"/>
+                <a:ea typeface="Helvetica Neue"/>
+                <a:cs typeface="Helvetica Neue"/>
+              </a:rPr>
               <a:t>Different judges can reduce dependence on one model’s preferences.</a:t>
             </a:r>
           </a:p>
@@ -7766,31 +8523,55 @@
           <a:lstStyle xmlns:a="http://schemas.openxmlformats.org/drawingml/2006/main"/>
           <a:p xmlns:a="http://schemas.openxmlformats.org/drawingml/2006/main">
             <a:pPr algn="l">
-              <a:defRPr sz="2400">
-                <a:solidFill>
-                  <a:srgbClr val="000000"/>
-                </a:solidFill>
-                <a:latin typeface="Helvetica Neue"/>
-                <a:ea typeface="Helvetica Neue"/>
-                <a:cs typeface="Helvetica Neue"/>
-              </a:defRPr>
-            </a:pPr>
-            <a:r>
+              <a:lnSpc>
+                <a:spcPct val="106000"/>
+              </a:lnSpc>
+              <a:buNone/>
+              <a:defRPr sz="1425" b="1">
+                <a:solidFill>
+                  <a:srgbClr val="000000"/>
+                </a:solidFill>
+                <a:latin typeface="Helvetica Neue"/>
+                <a:ea typeface="Helvetica Neue"/>
+                <a:cs typeface="Helvetica Neue"/>
+              </a:defRPr>
+            </a:pPr>
+            <a:r>
+              <a:rPr sz="1425" b="1">
+                <a:solidFill>
+                  <a:srgbClr val="000000"/>
+                </a:solidFill>
+                <a:latin typeface="Helvetica Neue"/>
+                <a:ea typeface="Helvetica Neue"/>
+                <a:cs typeface="Helvetica Neue"/>
+              </a:rPr>
               <a:t>HUMANS</a:t>
             </a:r>
           </a:p>
           <a:p xmlns:a="http://schemas.openxmlformats.org/drawingml/2006/main">
             <a:pPr algn="l">
-              <a:defRPr sz="2400">
-                <a:solidFill>
-                  <a:srgbClr val="000000"/>
-                </a:solidFill>
-                <a:latin typeface="Helvetica Neue"/>
-                <a:ea typeface="Helvetica Neue"/>
-                <a:cs typeface="Helvetica Neue"/>
-              </a:defRPr>
-            </a:pPr>
-            <a:r>
+              <a:lnSpc>
+                <a:spcPct val="106000"/>
+              </a:lnSpc>
+              <a:buNone/>
+              <a:defRPr sz="1425" b="1">
+                <a:solidFill>
+                  <a:srgbClr val="000000"/>
+                </a:solidFill>
+                <a:latin typeface="Helvetica Neue"/>
+                <a:ea typeface="Helvetica Neue"/>
+                <a:cs typeface="Helvetica Neue"/>
+              </a:defRPr>
+            </a:pPr>
+            <a:r>
+              <a:rPr sz="1425" b="1">
+                <a:solidFill>
+                  <a:srgbClr val="000000"/>
+                </a:solidFill>
+                <a:latin typeface="Helvetica Neue"/>
+                <a:ea typeface="Helvetica Neue"/>
+                <a:cs typeface="Helvetica Neue"/>
+              </a:rPr>
               <a:t>Read disagreements and raw answers before accepting the podium.</a:t>
             </a:r>
           </a:p>
@@ -7826,31 +8607,55 @@
           <a:lstStyle xmlns:a="http://schemas.openxmlformats.org/drawingml/2006/main"/>
           <a:p xmlns:a="http://schemas.openxmlformats.org/drawingml/2006/main">
             <a:pPr algn="l">
-              <a:defRPr sz="2400">
-                <a:solidFill>
-                  <a:srgbClr val="000000"/>
-                </a:solidFill>
-                <a:latin typeface="Helvetica Neue"/>
-                <a:ea typeface="Helvetica Neue"/>
-                <a:cs typeface="Helvetica Neue"/>
-              </a:defRPr>
-            </a:pPr>
-            <a:r>
+              <a:lnSpc>
+                <a:spcPct val="106000"/>
+              </a:lnSpc>
+              <a:buNone/>
+              <a:defRPr sz="1425" b="1">
+                <a:solidFill>
+                  <a:srgbClr val="000000"/>
+                </a:solidFill>
+                <a:latin typeface="Helvetica Neue"/>
+                <a:ea typeface="Helvetica Neue"/>
+                <a:cs typeface="Helvetica Neue"/>
+              </a:defRPr>
+            </a:pPr>
+            <a:r>
+              <a:rPr sz="1425" b="1">
+                <a:solidFill>
+                  <a:srgbClr val="000000"/>
+                </a:solidFill>
+                <a:latin typeface="Helvetica Neue"/>
+                <a:ea typeface="Helvetica Neue"/>
+                <a:cs typeface="Helvetica Neue"/>
+              </a:rPr>
               <a:t>BIAS</a:t>
             </a:r>
           </a:p>
           <a:p xmlns:a="http://schemas.openxmlformats.org/drawingml/2006/main">
             <a:pPr algn="l">
-              <a:defRPr sz="2400">
-                <a:solidFill>
-                  <a:srgbClr val="000000"/>
-                </a:solidFill>
-                <a:latin typeface="Helvetica Neue"/>
-                <a:ea typeface="Helvetica Neue"/>
-                <a:cs typeface="Helvetica Neue"/>
-              </a:defRPr>
-            </a:pPr>
-            <a:r>
+              <a:lnSpc>
+                <a:spcPct val="106000"/>
+              </a:lnSpc>
+              <a:buNone/>
+              <a:defRPr sz="1425" b="1">
+                <a:solidFill>
+                  <a:srgbClr val="000000"/>
+                </a:solidFill>
+                <a:latin typeface="Helvetica Neue"/>
+                <a:ea typeface="Helvetica Neue"/>
+                <a:cs typeface="Helvetica Neue"/>
+              </a:defRPr>
+            </a:pPr>
+            <a:r>
+              <a:rPr sz="1425" b="1">
+                <a:solidFill>
+                  <a:srgbClr val="000000"/>
+                </a:solidFill>
+                <a:latin typeface="Helvetica Neue"/>
+                <a:ea typeface="Helvetica Neue"/>
+                <a:cs typeface="Helvetica Neue"/>
+              </a:rPr>
               <a:t>Position, verbosity, style, family, and self-preference can still distort scores.</a:t>
             </a:r>
           </a:p>
@@ -7906,6 +8711,7 @@
           <a:lstStyle xmlns:a="http://schemas.openxmlformats.org/drawingml/2006/main"/>
           <a:p xmlns:a="http://schemas.openxmlformats.org/drawingml/2006/main">
             <a:pPr algn="r">
+              <a:buNone/>
               <a:defRPr sz="1000">
                 <a:solidFill>
                   <a:srgbClr val="000000"/>
@@ -7951,6 +8757,7 @@
           <a:lstStyle xmlns:a="http://schemas.openxmlformats.org/drawingml/2006/main"/>
           <a:p xmlns:a="http://schemas.openxmlformats.org/drawingml/2006/main">
             <a:pPr algn="l">
+              <a:buNone/>
               <a:defRPr sz="2900">
                 <a:solidFill>
                   <a:srgbClr val="000000"/>
@@ -7968,7 +8775,7 @@
       </p:sp>
       <p:cxnSp>
         <p:nvCxnSpPr>
-          <p:cNvPr id="15" name="Google-Shape-2259-p159-4"/>
+          <p:cNvPr id="24" name="Google-Shape-2259-p159-4"/>
           <p:cNvCxnSpPr/>
           <p:nvPr/>
         </p:nvCxnSpPr>
@@ -8099,6 +8906,7 @@
           <a:lstStyle xmlns:a="http://schemas.openxmlformats.org/drawingml/2006/main"/>
           <a:p xmlns:a="http://schemas.openxmlformats.org/drawingml/2006/main">
             <a:pPr algn="l">
+              <a:buNone/>
               <a:defRPr sz="1600">
                 <a:solidFill>
                   <a:srgbClr val="000000"/>
@@ -8144,6 +8952,7 @@
           <a:lstStyle xmlns:a="http://schemas.openxmlformats.org/drawingml/2006/main"/>
           <a:p xmlns:a="http://schemas.openxmlformats.org/drawingml/2006/main">
             <a:pPr algn="l">
+              <a:buNone/>
               <a:defRPr sz="1600">
                 <a:solidFill>
                   <a:srgbClr val="000000"/>
@@ -8189,6 +8998,7 @@
           <a:lstStyle xmlns:a="http://schemas.openxmlformats.org/drawingml/2006/main"/>
           <a:p xmlns:a="http://schemas.openxmlformats.org/drawingml/2006/main">
             <a:pPr algn="l">
+              <a:buNone/>
               <a:defRPr sz="1600">
                 <a:solidFill>
                   <a:srgbClr val="000000"/>
@@ -8234,6 +9044,7 @@
           <a:lstStyle xmlns:a="http://schemas.openxmlformats.org/drawingml/2006/main"/>
           <a:p xmlns:a="http://schemas.openxmlformats.org/drawingml/2006/main">
             <a:pPr algn="l">
+              <a:buNone/>
               <a:defRPr sz="2400">
                 <a:solidFill>
                   <a:srgbClr val="000000"/>
@@ -8249,6 +9060,7 @@
           </a:p>
           <a:p xmlns:a="http://schemas.openxmlformats.org/drawingml/2006/main">
             <a:pPr algn="l">
+              <a:buNone/>
               <a:defRPr sz="2400">
                 <a:solidFill>
                   <a:srgbClr val="000000"/>
@@ -8294,6 +9106,7 @@
           <a:lstStyle xmlns:a="http://schemas.openxmlformats.org/drawingml/2006/main"/>
           <a:p xmlns:a="http://schemas.openxmlformats.org/drawingml/2006/main">
             <a:pPr algn="l">
+              <a:buNone/>
               <a:defRPr sz="2400">
                 <a:solidFill>
                   <a:srgbClr val="000000"/>
@@ -8309,6 +9122,7 @@
           </a:p>
           <a:p xmlns:a="http://schemas.openxmlformats.org/drawingml/2006/main">
             <a:pPr algn="l">
+              <a:buNone/>
               <a:defRPr sz="2400">
                 <a:solidFill>
                   <a:srgbClr val="000000"/>
@@ -8354,6 +9168,7 @@
           <a:lstStyle xmlns:a="http://schemas.openxmlformats.org/drawingml/2006/main"/>
           <a:p xmlns:a="http://schemas.openxmlformats.org/drawingml/2006/main">
             <a:pPr algn="l">
+              <a:buNone/>
               <a:defRPr sz="2400">
                 <a:solidFill>
                   <a:srgbClr val="000000"/>
@@ -8369,6 +9184,7 @@
           </a:p>
           <a:p xmlns:a="http://schemas.openxmlformats.org/drawingml/2006/main">
             <a:pPr algn="l">
+              <a:buNone/>
               <a:defRPr sz="2400">
                 <a:solidFill>
                   <a:srgbClr val="000000"/>
@@ -8434,16 +9250,28 @@
           <a:lstStyle xmlns:a="http://schemas.openxmlformats.org/drawingml/2006/main"/>
           <a:p xmlns:a="http://schemas.openxmlformats.org/drawingml/2006/main">
             <a:pPr algn="r">
-              <a:defRPr sz="1000">
-                <a:solidFill>
-                  <a:srgbClr val="000000"/>
-                </a:solidFill>
-                <a:latin typeface="Helvetica Neue"/>
-                <a:ea typeface="Helvetica Neue"/>
-                <a:cs typeface="Helvetica Neue"/>
-              </a:defRPr>
-            </a:pPr>
-            <a:r>
+              <a:lnSpc>
+                <a:spcPct val="108000"/>
+              </a:lnSpc>
+              <a:buNone/>
+              <a:defRPr sz="1200" b="1">
+                <a:solidFill>
+                  <a:srgbClr val="000000"/>
+                </a:solidFill>
+                <a:latin typeface="Helvetica Neue"/>
+                <a:ea typeface="Helvetica Neue"/>
+                <a:cs typeface="Helvetica Neue"/>
+              </a:defRPr>
+            </a:pPr>
+            <a:r>
+              <a:rPr sz="1200" b="1">
+                <a:solidFill>
+                  <a:srgbClr val="000000"/>
+                </a:solidFill>
+                <a:latin typeface="Helvetica Neue"/>
+                <a:ea typeface="Helvetica Neue"/>
+                <a:cs typeface="Helvetica Neue"/>
+              </a:rPr>
               <a:t>17</a:t>
             </a:r>
           </a:p>
@@ -8479,16 +9307,28 @@
           <a:lstStyle xmlns:a="http://schemas.openxmlformats.org/drawingml/2006/main"/>
           <a:p xmlns:a="http://schemas.openxmlformats.org/drawingml/2006/main">
             <a:pPr algn="l">
-              <a:defRPr sz="2900">
-                <a:solidFill>
-                  <a:srgbClr val="000000"/>
-                </a:solidFill>
-                <a:latin typeface="Helvetica Neue"/>
-                <a:ea typeface="Helvetica Neue"/>
-                <a:cs typeface="Helvetica Neue"/>
-              </a:defRPr>
-            </a:pPr>
-            <a:r>
+              <a:lnSpc>
+                <a:spcPct val="98000"/>
+              </a:lnSpc>
+              <a:buNone/>
+              <a:defRPr sz="3375" b="1">
+                <a:solidFill>
+                  <a:srgbClr val="000000"/>
+                </a:solidFill>
+                <a:latin typeface="Helvetica Neue"/>
+                <a:ea typeface="Helvetica Neue"/>
+                <a:cs typeface="Helvetica Neue"/>
+              </a:defRPr>
+            </a:pPr>
+            <a:r>
+              <a:rPr sz="3375" b="1">
+                <a:solidFill>
+                  <a:srgbClr val="000000"/>
+                </a:solidFill>
+                <a:latin typeface="Helvetica Neue"/>
+                <a:ea typeface="Helvetica Neue"/>
+                <a:cs typeface="Helvetica Neue"/>
+              </a:rPr>
               <a:t>Use the results to have the larger conversation</a:t>
             </a:r>
           </a:p>
@@ -8522,31 +9362,55 @@
           <a:lstStyle xmlns:a="http://schemas.openxmlformats.org/drawingml/2006/main"/>
           <a:p xmlns:a="http://schemas.openxmlformats.org/drawingml/2006/main">
             <a:pPr algn="l">
-              <a:defRPr sz="2400">
-                <a:solidFill>
-                  <a:srgbClr val="000000"/>
-                </a:solidFill>
-                <a:latin typeface="Helvetica Neue"/>
-                <a:ea typeface="Helvetica Neue"/>
-                <a:cs typeface="Helvetica Neue"/>
-              </a:defRPr>
-            </a:pPr>
-            <a:r>
+              <a:lnSpc>
+                <a:spcPct val="114000"/>
+              </a:lnSpc>
+              <a:buNone/>
+              <a:defRPr sz="1500">
+                <a:solidFill>
+                  <a:srgbClr val="000000"/>
+                </a:solidFill>
+                <a:latin typeface="Helvetica Neue"/>
+                <a:ea typeface="Helvetica Neue"/>
+                <a:cs typeface="Helvetica Neue"/>
+              </a:defRPr>
+            </a:pPr>
+            <a:r>
+              <a:rPr sz="1500">
+                <a:solidFill>
+                  <a:srgbClr val="000000"/>
+                </a:solidFill>
+                <a:latin typeface="Helvetica Neue"/>
+                <a:ea typeface="Helvetica Neue"/>
+                <a:cs typeface="Helvetica Neue"/>
+              </a:rPr>
               <a:t>WORKHORSE</a:t>
             </a:r>
           </a:p>
           <a:p xmlns:a="http://schemas.openxmlformats.org/drawingml/2006/main">
             <a:pPr algn="l">
-              <a:defRPr sz="2400">
-                <a:solidFill>
-                  <a:srgbClr val="000000"/>
-                </a:solidFill>
-                <a:latin typeface="Helvetica Neue"/>
-                <a:ea typeface="Helvetica Neue"/>
-                <a:cs typeface="Helvetica Neue"/>
-              </a:defRPr>
-            </a:pPr>
-            <a:r>
+              <a:lnSpc>
+                <a:spcPct val="114000"/>
+              </a:lnSpc>
+              <a:buNone/>
+              <a:defRPr sz="1500">
+                <a:solidFill>
+                  <a:srgbClr val="000000"/>
+                </a:solidFill>
+                <a:latin typeface="Helvetica Neue"/>
+                <a:ea typeface="Helvetica Neue"/>
+                <a:cs typeface="Helvetica Neue"/>
+              </a:defRPr>
+            </a:pPr>
+            <a:r>
+              <a:rPr sz="1500">
+                <a:solidFill>
+                  <a:srgbClr val="000000"/>
+                </a:solidFill>
+                <a:latin typeface="Helvetica Neue"/>
+                <a:ea typeface="Helvetica Neue"/>
+                <a:cs typeface="Helvetica Neue"/>
+              </a:rPr>
               <a:t>Which model is fast and dependable on routine work?</a:t>
             </a:r>
           </a:p>
@@ -8580,31 +9444,55 @@
           <a:lstStyle xmlns:a="http://schemas.openxmlformats.org/drawingml/2006/main"/>
           <a:p xmlns:a="http://schemas.openxmlformats.org/drawingml/2006/main">
             <a:pPr algn="l">
-              <a:defRPr sz="2400">
-                <a:solidFill>
-                  <a:srgbClr val="000000"/>
-                </a:solidFill>
-                <a:latin typeface="Helvetica Neue"/>
-                <a:ea typeface="Helvetica Neue"/>
-                <a:cs typeface="Helvetica Neue"/>
-              </a:defRPr>
-            </a:pPr>
-            <a:r>
+              <a:lnSpc>
+                <a:spcPct val="114000"/>
+              </a:lnSpc>
+              <a:buNone/>
+              <a:defRPr sz="1500">
+                <a:solidFill>
+                  <a:srgbClr val="000000"/>
+                </a:solidFill>
+                <a:latin typeface="Helvetica Neue"/>
+                <a:ea typeface="Helvetica Neue"/>
+                <a:cs typeface="Helvetica Neue"/>
+              </a:defRPr>
+            </a:pPr>
+            <a:r>
+              <a:rPr sz="1500">
+                <a:solidFill>
+                  <a:srgbClr val="000000"/>
+                </a:solidFill>
+                <a:latin typeface="Helvetica Neue"/>
+                <a:ea typeface="Helvetica Neue"/>
+                <a:cs typeface="Helvetica Neue"/>
+              </a:rPr>
               <a:t>DEEP THINKER</a:t>
             </a:r>
           </a:p>
           <a:p xmlns:a="http://schemas.openxmlformats.org/drawingml/2006/main">
             <a:pPr algn="l">
-              <a:defRPr sz="2400">
-                <a:solidFill>
-                  <a:srgbClr val="000000"/>
-                </a:solidFill>
-                <a:latin typeface="Helvetica Neue"/>
-                <a:ea typeface="Helvetica Neue"/>
-                <a:cs typeface="Helvetica Neue"/>
-              </a:defRPr>
-            </a:pPr>
-            <a:r>
+              <a:lnSpc>
+                <a:spcPct val="114000"/>
+              </a:lnSpc>
+              <a:buNone/>
+              <a:defRPr sz="1500">
+                <a:solidFill>
+                  <a:srgbClr val="000000"/>
+                </a:solidFill>
+                <a:latin typeface="Helvetica Neue"/>
+                <a:ea typeface="Helvetica Neue"/>
+                <a:cs typeface="Helvetica Neue"/>
+              </a:defRPr>
+            </a:pPr>
+            <a:r>
+              <a:rPr sz="1500">
+                <a:solidFill>
+                  <a:srgbClr val="000000"/>
+                </a:solidFill>
+                <a:latin typeface="Helvetica Neue"/>
+                <a:ea typeface="Helvetica Neue"/>
+                <a:cs typeface="Helvetica Neue"/>
+              </a:rPr>
               <a:t>Which difficult tasks justify the strongest result?</a:t>
             </a:r>
           </a:p>
@@ -8640,31 +9528,55 @@
           <a:lstStyle xmlns:a="http://schemas.openxmlformats.org/drawingml/2006/main"/>
           <a:p xmlns:a="http://schemas.openxmlformats.org/drawingml/2006/main">
             <a:pPr algn="l">
-              <a:defRPr sz="2400">
-                <a:solidFill>
-                  <a:srgbClr val="000000"/>
-                </a:solidFill>
-                <a:latin typeface="Helvetica Neue"/>
-                <a:ea typeface="Helvetica Neue"/>
-                <a:cs typeface="Helvetica Neue"/>
-              </a:defRPr>
-            </a:pPr>
-            <a:r>
+              <a:lnSpc>
+                <a:spcPct val="114000"/>
+              </a:lnSpc>
+              <a:buNone/>
+              <a:defRPr sz="1500">
+                <a:solidFill>
+                  <a:srgbClr val="000000"/>
+                </a:solidFill>
+                <a:latin typeface="Helvetica Neue"/>
+                <a:ea typeface="Helvetica Neue"/>
+                <a:cs typeface="Helvetica Neue"/>
+              </a:defRPr>
+            </a:pPr>
+            <a:r>
+              <a:rPr sz="1500">
+                <a:solidFill>
+                  <a:srgbClr val="000000"/>
+                </a:solidFill>
+                <a:latin typeface="Helvetica Neue"/>
+                <a:ea typeface="Helvetica Neue"/>
+                <a:cs typeface="Helvetica Neue"/>
+              </a:rPr>
               <a:t>LOCAL</a:t>
             </a:r>
           </a:p>
           <a:p xmlns:a="http://schemas.openxmlformats.org/drawingml/2006/main">
             <a:pPr algn="l">
-              <a:defRPr sz="2400">
-                <a:solidFill>
-                  <a:srgbClr val="000000"/>
-                </a:solidFill>
-                <a:latin typeface="Helvetica Neue"/>
-                <a:ea typeface="Helvetica Neue"/>
-                <a:cs typeface="Helvetica Neue"/>
-              </a:defRPr>
-            </a:pPr>
-            <a:r>
+              <a:lnSpc>
+                <a:spcPct val="114000"/>
+              </a:lnSpc>
+              <a:buNone/>
+              <a:defRPr sz="1500">
+                <a:solidFill>
+                  <a:srgbClr val="000000"/>
+                </a:solidFill>
+                <a:latin typeface="Helvetica Neue"/>
+                <a:ea typeface="Helvetica Neue"/>
+                <a:cs typeface="Helvetica Neue"/>
+              </a:defRPr>
+            </a:pPr>
+            <a:r>
+              <a:rPr sz="1500">
+                <a:solidFill>
+                  <a:srgbClr val="000000"/>
+                </a:solidFill>
+                <a:latin typeface="Helvetica Neue"/>
+                <a:ea typeface="Helvetica Neue"/>
+                <a:cs typeface="Helvetica Neue"/>
+              </a:rPr>
               <a:t>Where is local already good enough—and where is it not?</a:t>
             </a:r>
           </a:p>
@@ -8700,31 +9612,55 @@
           <a:lstStyle xmlns:a="http://schemas.openxmlformats.org/drawingml/2006/main"/>
           <a:p xmlns:a="http://schemas.openxmlformats.org/drawingml/2006/main">
             <a:pPr algn="l">
-              <a:defRPr sz="2400">
-                <a:solidFill>
-                  <a:srgbClr val="000000"/>
-                </a:solidFill>
-                <a:latin typeface="Helvetica Neue"/>
-                <a:ea typeface="Helvetica Neue"/>
-                <a:cs typeface="Helvetica Neue"/>
-              </a:defRPr>
-            </a:pPr>
-            <a:r>
+              <a:lnSpc>
+                <a:spcPct val="114000"/>
+              </a:lnSpc>
+              <a:buNone/>
+              <a:defRPr sz="1500">
+                <a:solidFill>
+                  <a:srgbClr val="000000"/>
+                </a:solidFill>
+                <a:latin typeface="Helvetica Neue"/>
+                <a:ea typeface="Helvetica Neue"/>
+                <a:cs typeface="Helvetica Neue"/>
+              </a:defRPr>
+            </a:pPr>
+            <a:r>
+              <a:rPr sz="1500">
+                <a:solidFill>
+                  <a:srgbClr val="000000"/>
+                </a:solidFill>
+                <a:latin typeface="Helvetica Neue"/>
+                <a:ea typeface="Helvetica Neue"/>
+                <a:cs typeface="Helvetica Neue"/>
+              </a:rPr>
               <a:t>ROUTING</a:t>
             </a:r>
           </a:p>
           <a:p xmlns:a="http://schemas.openxmlformats.org/drawingml/2006/main">
             <a:pPr algn="l">
-              <a:defRPr sz="2400">
-                <a:solidFill>
-                  <a:srgbClr val="000000"/>
-                </a:solidFill>
-                <a:latin typeface="Helvetica Neue"/>
-                <a:ea typeface="Helvetica Neue"/>
-                <a:cs typeface="Helvetica Neue"/>
-              </a:defRPr>
-            </a:pPr>
-            <a:r>
+              <a:lnSpc>
+                <a:spcPct val="114000"/>
+              </a:lnSpc>
+              <a:buNone/>
+              <a:defRPr sz="1500">
+                <a:solidFill>
+                  <a:srgbClr val="000000"/>
+                </a:solidFill>
+                <a:latin typeface="Helvetica Neue"/>
+                <a:ea typeface="Helvetica Neue"/>
+                <a:cs typeface="Helvetica Neue"/>
+              </a:defRPr>
+            </a:pPr>
+            <a:r>
+              <a:rPr sz="1500">
+                <a:solidFill>
+                  <a:srgbClr val="000000"/>
+                </a:solidFill>
+                <a:latin typeface="Helvetica Neue"/>
+                <a:ea typeface="Helvetica Neue"/>
+                <a:cs typeface="Helvetica Neue"/>
+              </a:rPr>
               <a:t>What information would a future router need to decide well?</a:t>
             </a:r>
           </a:p>
@@ -8780,6 +9716,7 @@
           <a:lstStyle xmlns:a="http://schemas.openxmlformats.org/drawingml/2006/main"/>
           <a:p xmlns:a="http://schemas.openxmlformats.org/drawingml/2006/main">
             <a:pPr algn="r">
+              <a:buNone/>
               <a:defRPr sz="1000">
                 <a:solidFill>
                   <a:srgbClr val="000000"/>
@@ -8825,6 +9762,7 @@
           <a:lstStyle xmlns:a="http://schemas.openxmlformats.org/drawingml/2006/main"/>
           <a:p xmlns:a="http://schemas.openxmlformats.org/drawingml/2006/main">
             <a:pPr algn="l">
+              <a:buNone/>
               <a:defRPr sz="2900">
                 <a:solidFill>
                   <a:srgbClr val="000000"/>
@@ -8842,7 +9780,7 @@
       </p:sp>
       <p:cxnSp>
         <p:nvCxnSpPr>
-          <p:cNvPr id="15" name="Google-Shape-2259-p159-4"/>
+          <p:cNvPr id="24" name="Google-Shape-2259-p159-4"/>
           <p:cNvCxnSpPr/>
           <p:nvPr/>
         </p:nvCxnSpPr>
@@ -8973,6 +9911,7 @@
           <a:lstStyle xmlns:a="http://schemas.openxmlformats.org/drawingml/2006/main"/>
           <a:p xmlns:a="http://schemas.openxmlformats.org/drawingml/2006/main">
             <a:pPr algn="l">
+              <a:buNone/>
               <a:defRPr sz="1600">
                 <a:solidFill>
                   <a:srgbClr val="000000"/>
@@ -9018,6 +9957,7 @@
           <a:lstStyle xmlns:a="http://schemas.openxmlformats.org/drawingml/2006/main"/>
           <a:p xmlns:a="http://schemas.openxmlformats.org/drawingml/2006/main">
             <a:pPr algn="l">
+              <a:buNone/>
               <a:defRPr sz="1600">
                 <a:solidFill>
                   <a:srgbClr val="000000"/>
@@ -9063,6 +10003,7 @@
           <a:lstStyle xmlns:a="http://schemas.openxmlformats.org/drawingml/2006/main"/>
           <a:p xmlns:a="http://schemas.openxmlformats.org/drawingml/2006/main">
             <a:pPr algn="l">
+              <a:buNone/>
               <a:defRPr sz="1600">
                 <a:solidFill>
                   <a:srgbClr val="000000"/>
@@ -9108,6 +10049,7 @@
           <a:lstStyle xmlns:a="http://schemas.openxmlformats.org/drawingml/2006/main"/>
           <a:p xmlns:a="http://schemas.openxmlformats.org/drawingml/2006/main">
             <a:pPr algn="l">
+              <a:buNone/>
               <a:defRPr sz="2400">
                 <a:solidFill>
                   <a:srgbClr val="000000"/>
@@ -9123,6 +10065,7 @@
           </a:p>
           <a:p xmlns:a="http://schemas.openxmlformats.org/drawingml/2006/main">
             <a:pPr algn="l">
+              <a:buNone/>
               <a:defRPr sz="2400">
                 <a:solidFill>
                   <a:srgbClr val="000000"/>
@@ -9168,6 +10111,7 @@
           <a:lstStyle xmlns:a="http://schemas.openxmlformats.org/drawingml/2006/main"/>
           <a:p xmlns:a="http://schemas.openxmlformats.org/drawingml/2006/main">
             <a:pPr algn="l">
+              <a:buNone/>
               <a:defRPr sz="2400">
                 <a:solidFill>
                   <a:srgbClr val="000000"/>
@@ -9183,6 +10127,7 @@
           </a:p>
           <a:p xmlns:a="http://schemas.openxmlformats.org/drawingml/2006/main">
             <a:pPr algn="l">
+              <a:buNone/>
               <a:defRPr sz="2400">
                 <a:solidFill>
                   <a:srgbClr val="000000"/>
@@ -9228,6 +10173,7 @@
           <a:lstStyle xmlns:a="http://schemas.openxmlformats.org/drawingml/2006/main"/>
           <a:p xmlns:a="http://schemas.openxmlformats.org/drawingml/2006/main">
             <a:pPr algn="l">
+              <a:buNone/>
               <a:defRPr sz="2400">
                 <a:solidFill>
                   <a:srgbClr val="000000"/>
@@ -9243,6 +10189,7 @@
           </a:p>
           <a:p xmlns:a="http://schemas.openxmlformats.org/drawingml/2006/main">
             <a:pPr algn="l">
+              <a:buNone/>
               <a:defRPr sz="2400">
                 <a:solidFill>
                   <a:srgbClr val="000000"/>
@@ -9310,6 +10257,7 @@
           <a:lstStyle xmlns:a="http://schemas.openxmlformats.org/drawingml/2006/main"/>
           <a:p xmlns:a="http://schemas.openxmlformats.org/drawingml/2006/main">
             <a:pPr algn="l">
+              <a:buNone/>
               <a:defRPr sz="6000">
                 <a:solidFill>
                   <a:srgbClr val="000000"/>
@@ -9357,6 +10305,7 @@
           <a:lstStyle xmlns:a="http://schemas.openxmlformats.org/drawingml/2006/main"/>
           <a:p xmlns:a="http://schemas.openxmlformats.org/drawingml/2006/main">
             <a:pPr algn="l">
+              <a:buNone/>
               <a:defRPr sz="2400">
                 <a:solidFill>
                   <a:srgbClr val="000000"/>
@@ -9372,6 +10321,7 @@
           </a:p>
           <a:p xmlns:a="http://schemas.openxmlformats.org/drawingml/2006/main">
             <a:pPr algn="l">
+              <a:buNone/>
               <a:defRPr sz="2400">
                 <a:solidFill>
                   <a:srgbClr val="000000"/>
@@ -9387,6 +10337,7 @@
           </a:p>
           <a:p xmlns:a="http://schemas.openxmlformats.org/drawingml/2006/main">
             <a:pPr algn="l">
+              <a:buNone/>
               <a:defRPr sz="2400">
                 <a:solidFill>
                   <a:srgbClr val="000000"/>
@@ -9432,6 +10383,7 @@
           <a:lstStyle xmlns:a="http://schemas.openxmlformats.org/drawingml/2006/main"/>
           <a:p xmlns:a="http://schemas.openxmlformats.org/drawingml/2006/main">
             <a:pPr algn="l">
+              <a:buNone/>
               <a:defRPr sz="2400">
                 <a:solidFill>
                   <a:srgbClr val="000000"/>
@@ -9499,6 +10451,7 @@
           <a:lstStyle xmlns:a="http://schemas.openxmlformats.org/drawingml/2006/main"/>
           <a:p xmlns:a="http://schemas.openxmlformats.org/drawingml/2006/main">
             <a:pPr algn="r">
+              <a:buNone/>
               <a:defRPr sz="1000">
                 <a:solidFill>
                   <a:srgbClr val="000000"/>
@@ -9544,6 +10497,7 @@
           <a:lstStyle xmlns:a="http://schemas.openxmlformats.org/drawingml/2006/main"/>
           <a:p xmlns:a="http://schemas.openxmlformats.org/drawingml/2006/main">
             <a:pPr algn="l">
+              <a:buNone/>
               <a:defRPr sz="2900">
                 <a:solidFill>
                   <a:srgbClr val="000000"/>
@@ -9589,6 +10543,7 @@
           <a:lstStyle xmlns:a="http://schemas.openxmlformats.org/drawingml/2006/main"/>
           <a:p xmlns:a="http://schemas.openxmlformats.org/drawingml/2006/main">
             <a:pPr algn="l">
+              <a:buNone/>
               <a:defRPr sz="2400">
                 <a:solidFill>
                   <a:srgbClr val="000000"/>
@@ -9604,6 +10559,7 @@
           </a:p>
           <a:p xmlns:a="http://schemas.openxmlformats.org/drawingml/2006/main">
             <a:pPr algn="l">
+              <a:buNone/>
               <a:defRPr sz="2400">
                 <a:solidFill>
                   <a:srgbClr val="000000"/>
@@ -9649,6 +10605,7 @@
           <a:lstStyle xmlns:a="http://schemas.openxmlformats.org/drawingml/2006/main"/>
           <a:p xmlns:a="http://schemas.openxmlformats.org/drawingml/2006/main">
             <a:pPr algn="l">
+              <a:buNone/>
               <a:defRPr sz="2400">
                 <a:solidFill>
                   <a:srgbClr val="000000"/>
@@ -9664,6 +10621,7 @@
           </a:p>
           <a:p xmlns:a="http://schemas.openxmlformats.org/drawingml/2006/main">
             <a:pPr algn="l">
+              <a:buNone/>
               <a:defRPr sz="2400">
                 <a:solidFill>
                   <a:srgbClr val="000000"/>
@@ -9709,6 +10667,7 @@
           <a:lstStyle xmlns:a="http://schemas.openxmlformats.org/drawingml/2006/main"/>
           <a:p xmlns:a="http://schemas.openxmlformats.org/drawingml/2006/main">
             <a:pPr algn="l">
+              <a:buNone/>
               <a:defRPr sz="2400">
                 <a:solidFill>
                   <a:srgbClr val="000000"/>
@@ -9724,6 +10683,7 @@
           </a:p>
           <a:p xmlns:a="http://schemas.openxmlformats.org/drawingml/2006/main">
             <a:pPr algn="l">
+              <a:buNone/>
               <a:defRPr sz="2400">
                 <a:solidFill>
                   <a:srgbClr val="000000"/>
@@ -9789,16 +10749,28 @@
           <a:lstStyle xmlns:a="http://schemas.openxmlformats.org/drawingml/2006/main"/>
           <a:p xmlns:a="http://schemas.openxmlformats.org/drawingml/2006/main">
             <a:pPr algn="r">
-              <a:defRPr sz="1000">
-                <a:solidFill>
-                  <a:srgbClr val="000000"/>
-                </a:solidFill>
-                <a:latin typeface="Helvetica Neue"/>
-                <a:ea typeface="Helvetica Neue"/>
-                <a:cs typeface="Helvetica Neue"/>
-              </a:defRPr>
-            </a:pPr>
-            <a:r>
+              <a:lnSpc>
+                <a:spcPct val="108000"/>
+              </a:lnSpc>
+              <a:buNone/>
+              <a:defRPr sz="1200" b="1">
+                <a:solidFill>
+                  <a:srgbClr val="000000"/>
+                </a:solidFill>
+                <a:latin typeface="Helvetica Neue"/>
+                <a:ea typeface="Helvetica Neue"/>
+                <a:cs typeface="Helvetica Neue"/>
+              </a:defRPr>
+            </a:pPr>
+            <a:r>
+              <a:rPr sz="1200" b="1">
+                <a:solidFill>
+                  <a:srgbClr val="000000"/>
+                </a:solidFill>
+                <a:latin typeface="Helvetica Neue"/>
+                <a:ea typeface="Helvetica Neue"/>
+                <a:cs typeface="Helvetica Neue"/>
+              </a:rPr>
               <a:t>2</a:t>
             </a:r>
           </a:p>
@@ -9834,16 +10806,28 @@
           <a:lstStyle xmlns:a="http://schemas.openxmlformats.org/drawingml/2006/main"/>
           <a:p xmlns:a="http://schemas.openxmlformats.org/drawingml/2006/main">
             <a:pPr algn="l">
-              <a:defRPr sz="2900">
-                <a:solidFill>
-                  <a:srgbClr val="000000"/>
-                </a:solidFill>
-                <a:latin typeface="Helvetica Neue"/>
-                <a:ea typeface="Helvetica Neue"/>
-                <a:cs typeface="Helvetica Neue"/>
-              </a:defRPr>
-            </a:pPr>
-            <a:r>
+              <a:lnSpc>
+                <a:spcPct val="98000"/>
+              </a:lnSpc>
+              <a:buNone/>
+              <a:defRPr sz="3375" b="1">
+                <a:solidFill>
+                  <a:srgbClr val="000000"/>
+                </a:solidFill>
+                <a:latin typeface="Helvetica Neue"/>
+                <a:ea typeface="Helvetica Neue"/>
+                <a:cs typeface="Helvetica Neue"/>
+              </a:defRPr>
+            </a:pPr>
+            <a:r>
+              <a:rPr sz="3375" b="1">
+                <a:solidFill>
+                  <a:srgbClr val="000000"/>
+                </a:solidFill>
+                <a:latin typeface="Helvetica Neue"/>
+                <a:ea typeface="Helvetica Neue"/>
+                <a:cs typeface="Helvetica Neue"/>
+              </a:rPr>
               <a:t>Generous access created a reasonable habit</a:t>
             </a:r>
           </a:p>
@@ -9851,7 +10835,7 @@
       </p:sp>
       <p:cxnSp>
         <p:nvCxnSpPr>
-          <p:cNvPr id="18" name="Google-Shape-2259-p159-4"/>
+          <p:cNvPr id="27" name="Google-Shape-2259-p159-4"/>
           <p:cNvCxnSpPr/>
           <p:nvPr/>
         </p:nvCxnSpPr>
@@ -10011,31 +10995,55 @@
           <a:lstStyle xmlns:a="http://schemas.openxmlformats.org/drawingml/2006/main"/>
           <a:p xmlns:a="http://schemas.openxmlformats.org/drawingml/2006/main">
             <a:pPr algn="l">
-              <a:defRPr sz="1600">
-                <a:solidFill>
-                  <a:srgbClr val="000000"/>
-                </a:solidFill>
-                <a:latin typeface="Helvetica Neue"/>
-                <a:ea typeface="Helvetica Neue"/>
-                <a:cs typeface="Helvetica Neue"/>
-              </a:defRPr>
-            </a:pPr>
-            <a:r>
+              <a:lnSpc>
+                <a:spcPct val="114000"/>
+              </a:lnSpc>
+              <a:buNone/>
+              <a:defRPr sz="1350">
+                <a:solidFill>
+                  <a:srgbClr val="000000"/>
+                </a:solidFill>
+                <a:latin typeface="Helvetica Neue"/>
+                <a:ea typeface="Helvetica Neue"/>
+                <a:cs typeface="Helvetica Neue"/>
+              </a:defRPr>
+            </a:pPr>
+            <a:r>
+              <a:rPr sz="1350">
+                <a:solidFill>
+                  <a:srgbClr val="000000"/>
+                </a:solidFill>
+                <a:latin typeface="Helvetica Neue"/>
+                <a:ea typeface="Helvetica Neue"/>
+                <a:cs typeface="Helvetica Neue"/>
+              </a:rPr>
               <a:t>PERSONAL PLANS</a:t>
             </a:r>
           </a:p>
           <a:p xmlns:a="http://schemas.openxmlformats.org/drawingml/2006/main">
             <a:pPr algn="l">
-              <a:defRPr sz="1600">
-                <a:solidFill>
-                  <a:srgbClr val="000000"/>
-                </a:solidFill>
-                <a:latin typeface="Helvetica Neue"/>
-                <a:ea typeface="Helvetica Neue"/>
-                <a:cs typeface="Helvetica Neue"/>
-              </a:defRPr>
-            </a:pPr>
-            <a:r>
+              <a:lnSpc>
+                <a:spcPct val="114000"/>
+              </a:lnSpc>
+              <a:buNone/>
+              <a:defRPr sz="1350">
+                <a:solidFill>
+                  <a:srgbClr val="000000"/>
+                </a:solidFill>
+                <a:latin typeface="Helvetica Neue"/>
+                <a:ea typeface="Helvetica Neue"/>
+                <a:cs typeface="Helvetica Neue"/>
+              </a:defRPr>
+            </a:pPr>
+            <a:r>
+              <a:rPr sz="1350">
+                <a:solidFill>
+                  <a:srgbClr val="000000"/>
+                </a:solidFill>
+                <a:latin typeface="Helvetica Neue"/>
+                <a:ea typeface="Helvetica Neue"/>
+                <a:cs typeface="Helvetica Neue"/>
+              </a:rPr>
               <a:t>Flat monthly subscriptions often delivered far more apparent token value than their price.</a:t>
             </a:r>
           </a:p>
@@ -10100,31 +11108,55 @@
           <a:lstStyle xmlns:a="http://schemas.openxmlformats.org/drawingml/2006/main"/>
           <a:p xmlns:a="http://schemas.openxmlformats.org/drawingml/2006/main">
             <a:pPr algn="l">
-              <a:defRPr sz="1600">
-                <a:solidFill>
-                  <a:srgbClr val="000000"/>
-                </a:solidFill>
-                <a:latin typeface="Helvetica Neue"/>
-                <a:ea typeface="Helvetica Neue"/>
-                <a:cs typeface="Helvetica Neue"/>
-              </a:defRPr>
-            </a:pPr>
-            <a:r>
+              <a:lnSpc>
+                <a:spcPct val="114000"/>
+              </a:lnSpc>
+              <a:buNone/>
+              <a:defRPr sz="1350">
+                <a:solidFill>
+                  <a:srgbClr val="000000"/>
+                </a:solidFill>
+                <a:latin typeface="Helvetica Neue"/>
+                <a:ea typeface="Helvetica Neue"/>
+                <a:cs typeface="Helvetica Neue"/>
+              </a:defRPr>
+            </a:pPr>
+            <a:r>
+              <a:rPr sz="1350">
+                <a:solidFill>
+                  <a:srgbClr val="000000"/>
+                </a:solidFill>
+                <a:latin typeface="Helvetica Neue"/>
+                <a:ea typeface="Helvetica Neue"/>
+                <a:cs typeface="Helvetica Neue"/>
+              </a:rPr>
               <a:t>PROMOTIONAL ERA</a:t>
             </a:r>
           </a:p>
           <a:p xmlns:a="http://schemas.openxmlformats.org/drawingml/2006/main">
             <a:pPr algn="l">
-              <a:defRPr sz="1600">
-                <a:solidFill>
-                  <a:srgbClr val="000000"/>
-                </a:solidFill>
-                <a:latin typeface="Helvetica Neue"/>
-                <a:ea typeface="Helvetica Neue"/>
-                <a:cs typeface="Helvetica Neue"/>
-              </a:defRPr>
-            </a:pPr>
-            <a:r>
+              <a:lnSpc>
+                <a:spcPct val="114000"/>
+              </a:lnSpc>
+              <a:buNone/>
+              <a:defRPr sz="1350">
+                <a:solidFill>
+                  <a:srgbClr val="000000"/>
+                </a:solidFill>
+                <a:latin typeface="Helvetica Neue"/>
+                <a:ea typeface="Helvetica Neue"/>
+                <a:cs typeface="Helvetica Neue"/>
+              </a:defRPr>
+            </a:pPr>
+            <a:r>
+              <a:rPr sz="1350">
+                <a:solidFill>
+                  <a:srgbClr val="000000"/>
+                </a:solidFill>
+                <a:latin typeface="Helvetica Neue"/>
+                <a:ea typeface="Helvetica Neue"/>
+                <a:cs typeface="Helvetica Neue"/>
+              </a:rPr>
               <a:t>Free usage and subsidized adoption made marginal inference feel invisible.</a:t>
             </a:r>
           </a:p>
@@ -10189,31 +11221,55 @@
           <a:lstStyle xmlns:a="http://schemas.openxmlformats.org/drawingml/2006/main"/>
           <a:p xmlns:a="http://schemas.openxmlformats.org/drawingml/2006/main">
             <a:pPr algn="l">
-              <a:defRPr sz="1600">
-                <a:solidFill>
-                  <a:srgbClr val="000000"/>
-                </a:solidFill>
-                <a:latin typeface="Helvetica Neue"/>
-                <a:ea typeface="Helvetica Neue"/>
-                <a:cs typeface="Helvetica Neue"/>
-              </a:defRPr>
-            </a:pPr>
-            <a:r>
+              <a:lnSpc>
+                <a:spcPct val="114000"/>
+              </a:lnSpc>
+              <a:buNone/>
+              <a:defRPr sz="1350">
+                <a:solidFill>
+                  <a:srgbClr val="000000"/>
+                </a:solidFill>
+                <a:latin typeface="Helvetica Neue"/>
+                <a:ea typeface="Helvetica Neue"/>
+                <a:cs typeface="Helvetica Neue"/>
+              </a:defRPr>
+            </a:pPr>
+            <a:r>
+              <a:rPr sz="1350">
+                <a:solidFill>
+                  <a:srgbClr val="000000"/>
+                </a:solidFill>
+                <a:latin typeface="Helvetica Neue"/>
+                <a:ea typeface="Helvetica Neue"/>
+                <a:cs typeface="Helvetica Neue"/>
+              </a:rPr>
               <a:t>DEFAULT BEHAVIOR</a:t>
             </a:r>
           </a:p>
           <a:p xmlns:a="http://schemas.openxmlformats.org/drawingml/2006/main">
             <a:pPr algn="l">
-              <a:defRPr sz="1600">
-                <a:solidFill>
-                  <a:srgbClr val="000000"/>
-                </a:solidFill>
-                <a:latin typeface="Helvetica Neue"/>
-                <a:ea typeface="Helvetica Neue"/>
-                <a:cs typeface="Helvetica Neue"/>
-              </a:defRPr>
-            </a:pPr>
-            <a:r>
+              <a:lnSpc>
+                <a:spcPct val="114000"/>
+              </a:lnSpc>
+              <a:buNone/>
+              <a:defRPr sz="1350">
+                <a:solidFill>
+                  <a:srgbClr val="000000"/>
+                </a:solidFill>
+                <a:latin typeface="Helvetica Neue"/>
+                <a:ea typeface="Helvetica Neue"/>
+                <a:cs typeface="Helvetica Neue"/>
+              </a:defRPr>
+            </a:pPr>
+            <a:r>
+              <a:rPr sz="1350">
+                <a:solidFill>
+                  <a:srgbClr val="000000"/>
+                </a:solidFill>
+                <a:latin typeface="Helvetica Neue"/>
+                <a:ea typeface="Helvetica Neue"/>
+                <a:cs typeface="Helvetica Neue"/>
+              </a:rPr>
               <a:t>Many developers simply leave the strongest available model selected.</a:t>
             </a:r>
           </a:p>
@@ -10249,16 +11305,28 @@
           <a:lstStyle xmlns:a="http://schemas.openxmlformats.org/drawingml/2006/main"/>
           <a:p xmlns:a="http://schemas.openxmlformats.org/drawingml/2006/main">
             <a:pPr algn="l">
-              <a:defRPr sz="2400">
-                <a:solidFill>
-                  <a:srgbClr val="000000"/>
-                </a:solidFill>
-                <a:latin typeface="Helvetica Neue"/>
-                <a:ea typeface="Helvetica Neue"/>
-                <a:cs typeface="Helvetica Neue"/>
-              </a:defRPr>
-            </a:pPr>
-            <a:r>
+              <a:lnSpc>
+                <a:spcPct val="108000"/>
+              </a:lnSpc>
+              <a:buNone/>
+              <a:defRPr sz="1200" b="1">
+                <a:solidFill>
+                  <a:srgbClr val="000000"/>
+                </a:solidFill>
+                <a:latin typeface="Helvetica Neue"/>
+                <a:ea typeface="Helvetica Neue"/>
+                <a:cs typeface="Helvetica Neue"/>
+              </a:defRPr>
+            </a:pPr>
+            <a:r>
+              <a:rPr sz="1200" b="1">
+                <a:solidFill>
+                  <a:srgbClr val="000000"/>
+                </a:solidFill>
+                <a:latin typeface="Helvetica Neue"/>
+                <a:ea typeface="Helvetica Neue"/>
+                <a:cs typeface="Helvetica Neue"/>
+              </a:rPr>
               <a:t>EXPECTATION</a:t>
             </a:r>
           </a:p>
@@ -10294,16 +11362,28 @@
           <a:lstStyle xmlns:a="http://schemas.openxmlformats.org/drawingml/2006/main"/>
           <a:p xmlns:a="http://schemas.openxmlformats.org/drawingml/2006/main">
             <a:pPr algn="l">
-              <a:defRPr sz="2400">
-                <a:solidFill>
-                  <a:srgbClr val="000000"/>
-                </a:solidFill>
-                <a:latin typeface="Helvetica Neue"/>
-                <a:ea typeface="Helvetica Neue"/>
-                <a:cs typeface="Helvetica Neue"/>
-              </a:defRPr>
-            </a:pPr>
-            <a:r>
+              <a:lnSpc>
+                <a:spcPct val="108000"/>
+              </a:lnSpc>
+              <a:buNone/>
+              <a:defRPr sz="1200" b="1">
+                <a:solidFill>
+                  <a:srgbClr val="000000"/>
+                </a:solidFill>
+                <a:latin typeface="Helvetica Neue"/>
+                <a:ea typeface="Helvetica Neue"/>
+                <a:cs typeface="Helvetica Neue"/>
+              </a:defRPr>
+            </a:pPr>
+            <a:r>
+              <a:rPr sz="1200" b="1">
+                <a:solidFill>
+                  <a:srgbClr val="000000"/>
+                </a:solidFill>
+                <a:latin typeface="Helvetica Neue"/>
+                <a:ea typeface="Helvetica Neue"/>
+                <a:cs typeface="Helvetica Neue"/>
+              </a:rPr>
               <a:t>ACCESS</a:t>
             </a:r>
           </a:p>
@@ -10339,16 +11419,28 @@
           <a:lstStyle xmlns:a="http://schemas.openxmlformats.org/drawingml/2006/main"/>
           <a:p xmlns:a="http://schemas.openxmlformats.org/drawingml/2006/main">
             <a:pPr algn="l">
-              <a:defRPr sz="2400">
-                <a:solidFill>
-                  <a:srgbClr val="000000"/>
-                </a:solidFill>
-                <a:latin typeface="Helvetica Neue"/>
-                <a:ea typeface="Helvetica Neue"/>
-                <a:cs typeface="Helvetica Neue"/>
-              </a:defRPr>
-            </a:pPr>
-            <a:r>
+              <a:lnSpc>
+                <a:spcPct val="108000"/>
+              </a:lnSpc>
+              <a:buNone/>
+              <a:defRPr sz="1200" b="1">
+                <a:solidFill>
+                  <a:srgbClr val="000000"/>
+                </a:solidFill>
+                <a:latin typeface="Helvetica Neue"/>
+                <a:ea typeface="Helvetica Neue"/>
+                <a:cs typeface="Helvetica Neue"/>
+              </a:defRPr>
+            </a:pPr>
+            <a:r>
+              <a:rPr sz="1200" b="1">
+                <a:solidFill>
+                  <a:srgbClr val="000000"/>
+                </a:solidFill>
+                <a:latin typeface="Helvetica Neue"/>
+                <a:ea typeface="Helvetica Neue"/>
+                <a:cs typeface="Helvetica Neue"/>
+              </a:rPr>
               <a:t>HABIT</a:t>
             </a:r>
           </a:p>
@@ -10406,6 +11498,7 @@
           <a:lstStyle xmlns:a="http://schemas.openxmlformats.org/drawingml/2006/main"/>
           <a:p xmlns:a="http://schemas.openxmlformats.org/drawingml/2006/main">
             <a:pPr algn="l">
+              <a:buNone/>
               <a:defRPr sz="6000">
                 <a:solidFill>
                   <a:srgbClr val="000000"/>
@@ -10452,6 +11545,7 @@
           <a:lstStyle xmlns:a="http://schemas.openxmlformats.org/drawingml/2006/main"/>
           <a:p xmlns:a="http://schemas.openxmlformats.org/drawingml/2006/main">
             <a:pPr algn="l">
+              <a:buNone/>
               <a:defRPr sz="2400">
                 <a:solidFill>
                   <a:srgbClr val="000000"/>
@@ -10497,6 +11591,7 @@
           <a:lstStyle xmlns:a="http://schemas.openxmlformats.org/drawingml/2006/main"/>
           <a:p xmlns:a="http://schemas.openxmlformats.org/drawingml/2006/main">
             <a:pPr algn="l">
+              <a:buNone/>
               <a:defRPr sz="2400">
                 <a:solidFill>
                   <a:srgbClr val="000000"/>
@@ -10562,16 +11657,28 @@
           <a:lstStyle xmlns:a="http://schemas.openxmlformats.org/drawingml/2006/main"/>
           <a:p xmlns:a="http://schemas.openxmlformats.org/drawingml/2006/main">
             <a:pPr algn="r">
-              <a:defRPr sz="1000">
-                <a:solidFill>
-                  <a:srgbClr val="000000"/>
-                </a:solidFill>
-                <a:latin typeface="Helvetica Neue"/>
-                <a:ea typeface="Helvetica Neue"/>
-                <a:cs typeface="Helvetica Neue"/>
-              </a:defRPr>
-            </a:pPr>
-            <a:r>
+              <a:lnSpc>
+                <a:spcPct val="108000"/>
+              </a:lnSpc>
+              <a:buNone/>
+              <a:defRPr sz="1200" b="1">
+                <a:solidFill>
+                  <a:srgbClr val="000000"/>
+                </a:solidFill>
+                <a:latin typeface="Helvetica Neue"/>
+                <a:ea typeface="Helvetica Neue"/>
+                <a:cs typeface="Helvetica Neue"/>
+              </a:defRPr>
+            </a:pPr>
+            <a:r>
+              <a:rPr sz="1200" b="1">
+                <a:solidFill>
+                  <a:srgbClr val="000000"/>
+                </a:solidFill>
+                <a:latin typeface="Helvetica Neue"/>
+                <a:ea typeface="Helvetica Neue"/>
+                <a:cs typeface="Helvetica Neue"/>
+              </a:rPr>
               <a:t>3</a:t>
             </a:r>
           </a:p>
@@ -10607,16 +11714,28 @@
           <a:lstStyle xmlns:a="http://schemas.openxmlformats.org/drawingml/2006/main"/>
           <a:p xmlns:a="http://schemas.openxmlformats.org/drawingml/2006/main">
             <a:pPr algn="l">
-              <a:defRPr sz="2900">
-                <a:solidFill>
-                  <a:srgbClr val="000000"/>
-                </a:solidFill>
-                <a:latin typeface="Helvetica Neue"/>
-                <a:ea typeface="Helvetica Neue"/>
-                <a:cs typeface="Helvetica Neue"/>
-              </a:defRPr>
-            </a:pPr>
-            <a:r>
+              <a:lnSpc>
+                <a:spcPct val="98000"/>
+              </a:lnSpc>
+              <a:buNone/>
+              <a:defRPr sz="3375" b="1">
+                <a:solidFill>
+                  <a:srgbClr val="000000"/>
+                </a:solidFill>
+                <a:latin typeface="Helvetica Neue"/>
+                <a:ea typeface="Helvetica Neue"/>
+                <a:cs typeface="Helvetica Neue"/>
+              </a:defRPr>
+            </a:pPr>
+            <a:r>
+              <a:rPr sz="3375" b="1">
+                <a:solidFill>
+                  <a:srgbClr val="000000"/>
+                </a:solidFill>
+                <a:latin typeface="Helvetica Neue"/>
+                <a:ea typeface="Helvetica Neue"/>
+                <a:cs typeface="Helvetica Neue"/>
+              </a:rPr>
               <a:t>One request can become an expensive workflow</a:t>
             </a:r>
           </a:p>
@@ -10650,31 +11769,55 @@
           <a:lstStyle xmlns:a="http://schemas.openxmlformats.org/drawingml/2006/main"/>
           <a:p xmlns:a="http://schemas.openxmlformats.org/drawingml/2006/main">
             <a:pPr algn="l">
-              <a:defRPr sz="2400">
-                <a:solidFill>
-                  <a:srgbClr val="000000"/>
-                </a:solidFill>
-                <a:latin typeface="Helvetica Neue"/>
-                <a:ea typeface="Helvetica Neue"/>
-                <a:cs typeface="Helvetica Neue"/>
-              </a:defRPr>
-            </a:pPr>
-            <a:r>
+              <a:lnSpc>
+                <a:spcPct val="114000"/>
+              </a:lnSpc>
+              <a:buNone/>
+              <a:defRPr sz="1500">
+                <a:solidFill>
+                  <a:srgbClr val="000000"/>
+                </a:solidFill>
+                <a:latin typeface="Helvetica Neue"/>
+                <a:ea typeface="Helvetica Neue"/>
+                <a:cs typeface="Helvetica Neue"/>
+              </a:defRPr>
+            </a:pPr>
+            <a:r>
+              <a:rPr sz="1500">
+                <a:solidFill>
+                  <a:srgbClr val="000000"/>
+                </a:solidFill>
+                <a:latin typeface="Helvetica Neue"/>
+                <a:ea typeface="Helvetica Neue"/>
+                <a:cs typeface="Helvetica Neue"/>
+              </a:rPr>
               <a:t>PLAN</a:t>
             </a:r>
           </a:p>
           <a:p xmlns:a="http://schemas.openxmlformats.org/drawingml/2006/main">
             <a:pPr algn="l">
-              <a:defRPr sz="2400">
-                <a:solidFill>
-                  <a:srgbClr val="000000"/>
-                </a:solidFill>
-                <a:latin typeface="Helvetica Neue"/>
-                <a:ea typeface="Helvetica Neue"/>
-                <a:cs typeface="Helvetica Neue"/>
-              </a:defRPr>
-            </a:pPr>
-            <a:r>
+              <a:lnSpc>
+                <a:spcPct val="114000"/>
+              </a:lnSpc>
+              <a:buNone/>
+              <a:defRPr sz="1500">
+                <a:solidFill>
+                  <a:srgbClr val="000000"/>
+                </a:solidFill>
+                <a:latin typeface="Helvetica Neue"/>
+                <a:ea typeface="Helvetica Neue"/>
+                <a:cs typeface="Helvetica Neue"/>
+              </a:defRPr>
+            </a:pPr>
+            <a:r>
+              <a:rPr sz="1500">
+                <a:solidFill>
+                  <a:srgbClr val="000000"/>
+                </a:solidFill>
+                <a:latin typeface="Helvetica Neue"/>
+                <a:ea typeface="Helvetica Neue"/>
+                <a:cs typeface="Helvetica Neue"/>
+              </a:rPr>
               <a:t>The agent may interpret, decompose, and research before changing anything.</a:t>
             </a:r>
           </a:p>
@@ -10708,31 +11851,55 @@
           <a:lstStyle xmlns:a="http://schemas.openxmlformats.org/drawingml/2006/main"/>
           <a:p xmlns:a="http://schemas.openxmlformats.org/drawingml/2006/main">
             <a:pPr algn="l">
-              <a:defRPr sz="2400">
-                <a:solidFill>
-                  <a:srgbClr val="000000"/>
-                </a:solidFill>
-                <a:latin typeface="Helvetica Neue"/>
-                <a:ea typeface="Helvetica Neue"/>
-                <a:cs typeface="Helvetica Neue"/>
-              </a:defRPr>
-            </a:pPr>
-            <a:r>
+              <a:lnSpc>
+                <a:spcPct val="114000"/>
+              </a:lnSpc>
+              <a:buNone/>
+              <a:defRPr sz="1500">
+                <a:solidFill>
+                  <a:srgbClr val="000000"/>
+                </a:solidFill>
+                <a:latin typeface="Helvetica Neue"/>
+                <a:ea typeface="Helvetica Neue"/>
+                <a:cs typeface="Helvetica Neue"/>
+              </a:defRPr>
+            </a:pPr>
+            <a:r>
+              <a:rPr sz="1500">
+                <a:solidFill>
+                  <a:srgbClr val="000000"/>
+                </a:solidFill>
+                <a:latin typeface="Helvetica Neue"/>
+                <a:ea typeface="Helvetica Neue"/>
+                <a:cs typeface="Helvetica Neue"/>
+              </a:rPr>
               <a:t>BUILD</a:t>
             </a:r>
           </a:p>
           <a:p xmlns:a="http://schemas.openxmlformats.org/drawingml/2006/main">
             <a:pPr algn="l">
-              <a:defRPr sz="2400">
-                <a:solidFill>
-                  <a:srgbClr val="000000"/>
-                </a:solidFill>
-                <a:latin typeface="Helvetica Neue"/>
-                <a:ea typeface="Helvetica Neue"/>
-                <a:cs typeface="Helvetica Neue"/>
-              </a:defRPr>
-            </a:pPr>
-            <a:r>
+              <a:lnSpc>
+                <a:spcPct val="114000"/>
+              </a:lnSpc>
+              <a:buNone/>
+              <a:defRPr sz="1500">
+                <a:solidFill>
+                  <a:srgbClr val="000000"/>
+                </a:solidFill>
+                <a:latin typeface="Helvetica Neue"/>
+                <a:ea typeface="Helvetica Neue"/>
+                <a:cs typeface="Helvetica Neue"/>
+              </a:defRPr>
+            </a:pPr>
+            <a:r>
+              <a:rPr sz="1500">
+                <a:solidFill>
+                  <a:srgbClr val="000000"/>
+                </a:solidFill>
+                <a:latin typeface="Helvetica Neue"/>
+                <a:ea typeface="Helvetica Neue"/>
+                <a:cs typeface="Helvetica Neue"/>
+              </a:rPr>
               <a:t>Implementation can involve many tool calls and multiple model turns.</a:t>
             </a:r>
           </a:p>
@@ -10768,31 +11935,55 @@
           <a:lstStyle xmlns:a="http://schemas.openxmlformats.org/drawingml/2006/main"/>
           <a:p xmlns:a="http://schemas.openxmlformats.org/drawingml/2006/main">
             <a:pPr algn="l">
-              <a:defRPr sz="2400">
-                <a:solidFill>
-                  <a:srgbClr val="000000"/>
-                </a:solidFill>
-                <a:latin typeface="Helvetica Neue"/>
-                <a:ea typeface="Helvetica Neue"/>
-                <a:cs typeface="Helvetica Neue"/>
-              </a:defRPr>
-            </a:pPr>
-            <a:r>
+              <a:lnSpc>
+                <a:spcPct val="114000"/>
+              </a:lnSpc>
+              <a:buNone/>
+              <a:defRPr sz="1500">
+                <a:solidFill>
+                  <a:srgbClr val="000000"/>
+                </a:solidFill>
+                <a:latin typeface="Helvetica Neue"/>
+                <a:ea typeface="Helvetica Neue"/>
+                <a:cs typeface="Helvetica Neue"/>
+              </a:defRPr>
+            </a:pPr>
+            <a:r>
+              <a:rPr sz="1500">
+                <a:solidFill>
+                  <a:srgbClr val="000000"/>
+                </a:solidFill>
+                <a:latin typeface="Helvetica Neue"/>
+                <a:ea typeface="Helvetica Neue"/>
+                <a:cs typeface="Helvetica Neue"/>
+              </a:rPr>
               <a:t>VERIFY</a:t>
             </a:r>
           </a:p>
           <a:p xmlns:a="http://schemas.openxmlformats.org/drawingml/2006/main">
             <a:pPr algn="l">
-              <a:defRPr sz="2400">
-                <a:solidFill>
-                  <a:srgbClr val="000000"/>
-                </a:solidFill>
-                <a:latin typeface="Helvetica Neue"/>
-                <a:ea typeface="Helvetica Neue"/>
-                <a:cs typeface="Helvetica Neue"/>
-              </a:defRPr>
-            </a:pPr>
-            <a:r>
+              <a:lnSpc>
+                <a:spcPct val="114000"/>
+              </a:lnSpc>
+              <a:buNone/>
+              <a:defRPr sz="1500">
+                <a:solidFill>
+                  <a:srgbClr val="000000"/>
+                </a:solidFill>
+                <a:latin typeface="Helvetica Neue"/>
+                <a:ea typeface="Helvetica Neue"/>
+                <a:cs typeface="Helvetica Neue"/>
+              </a:defRPr>
+            </a:pPr>
+            <a:r>
+              <a:rPr sz="1500">
+                <a:solidFill>
+                  <a:srgbClr val="000000"/>
+                </a:solidFill>
+                <a:latin typeface="Helvetica Neue"/>
+                <a:ea typeface="Helvetica Neue"/>
+                <a:cs typeface="Helvetica Neue"/>
+              </a:rPr>
               <a:t>Tests, review, repair, and reruns add more calls.</a:t>
             </a:r>
           </a:p>
@@ -10828,31 +12019,55 @@
           <a:lstStyle xmlns:a="http://schemas.openxmlformats.org/drawingml/2006/main"/>
           <a:p xmlns:a="http://schemas.openxmlformats.org/drawingml/2006/main">
             <a:pPr algn="l">
-              <a:defRPr sz="2400">
-                <a:solidFill>
-                  <a:srgbClr val="000000"/>
-                </a:solidFill>
-                <a:latin typeface="Helvetica Neue"/>
-                <a:ea typeface="Helvetica Neue"/>
-                <a:cs typeface="Helvetica Neue"/>
-              </a:defRPr>
-            </a:pPr>
-            <a:r>
+              <a:lnSpc>
+                <a:spcPct val="114000"/>
+              </a:lnSpc>
+              <a:buNone/>
+              <a:defRPr sz="1500">
+                <a:solidFill>
+                  <a:srgbClr val="000000"/>
+                </a:solidFill>
+                <a:latin typeface="Helvetica Neue"/>
+                <a:ea typeface="Helvetica Neue"/>
+                <a:cs typeface="Helvetica Neue"/>
+              </a:defRPr>
+            </a:pPr>
+            <a:r>
+              <a:rPr sz="1500">
+                <a:solidFill>
+                  <a:srgbClr val="000000"/>
+                </a:solidFill>
+                <a:latin typeface="Helvetica Neue"/>
+                <a:ea typeface="Helvetica Neue"/>
+                <a:cs typeface="Helvetica Neue"/>
+              </a:rPr>
               <a:t>OPERATE</a:t>
             </a:r>
           </a:p>
           <a:p xmlns:a="http://schemas.openxmlformats.org/drawingml/2006/main">
             <a:pPr algn="l">
-              <a:defRPr sz="2400">
-                <a:solidFill>
-                  <a:srgbClr val="000000"/>
-                </a:solidFill>
-                <a:latin typeface="Helvetica Neue"/>
-                <a:ea typeface="Helvetica Neue"/>
-                <a:cs typeface="Helvetica Neue"/>
-              </a:defRPr>
-            </a:pPr>
-            <a:r>
+              <a:lnSpc>
+                <a:spcPct val="114000"/>
+              </a:lnSpc>
+              <a:buNone/>
+              <a:defRPr sz="1500">
+                <a:solidFill>
+                  <a:srgbClr val="000000"/>
+                </a:solidFill>
+                <a:latin typeface="Helvetica Neue"/>
+                <a:ea typeface="Helvetica Neue"/>
+                <a:cs typeface="Helvetica Neue"/>
+              </a:defRPr>
+            </a:pPr>
+            <a:r>
+              <a:rPr sz="1500">
+                <a:solidFill>
+                  <a:srgbClr val="000000"/>
+                </a:solidFill>
+                <a:latin typeface="Helvetica Neue"/>
+                <a:ea typeface="Helvetica Neue"/>
+                <a:cs typeface="Helvetica Neue"/>
+              </a:rPr>
               <a:t>Retries, fallbacks, monitoring, and support continue after launch.</a:t>
             </a:r>
           </a:p>
@@ -10910,6 +12125,7 @@
           <a:lstStyle xmlns:a="http://schemas.openxmlformats.org/drawingml/2006/main"/>
           <a:p xmlns:a="http://schemas.openxmlformats.org/drawingml/2006/main">
             <a:pPr algn="l">
+              <a:buNone/>
               <a:defRPr sz="6000">
                 <a:solidFill>
                   <a:srgbClr val="000000"/>
@@ -10956,6 +12172,7 @@
           <a:lstStyle xmlns:a="http://schemas.openxmlformats.org/drawingml/2006/main"/>
           <a:p xmlns:a="http://schemas.openxmlformats.org/drawingml/2006/main">
             <a:pPr algn="l">
+              <a:buNone/>
               <a:defRPr sz="2400">
                 <a:solidFill>
                   <a:srgbClr val="000000"/>
@@ -11001,6 +12218,7 @@
           <a:lstStyle xmlns:a="http://schemas.openxmlformats.org/drawingml/2006/main"/>
           <a:p xmlns:a="http://schemas.openxmlformats.org/drawingml/2006/main">
             <a:pPr algn="l">
+              <a:buNone/>
               <a:defRPr sz="2400">
                 <a:solidFill>
                   <a:srgbClr val="000000"/>
@@ -11066,16 +12284,28 @@
           <a:lstStyle xmlns:a="http://schemas.openxmlformats.org/drawingml/2006/main"/>
           <a:p xmlns:a="http://schemas.openxmlformats.org/drawingml/2006/main">
             <a:pPr algn="r">
-              <a:defRPr sz="1000">
-                <a:solidFill>
-                  <a:srgbClr val="000000"/>
-                </a:solidFill>
-                <a:latin typeface="Helvetica Neue"/>
-                <a:ea typeface="Helvetica Neue"/>
-                <a:cs typeface="Helvetica Neue"/>
-              </a:defRPr>
-            </a:pPr>
-            <a:r>
+              <a:lnSpc>
+                <a:spcPct val="108000"/>
+              </a:lnSpc>
+              <a:buNone/>
+              <a:defRPr sz="1200" b="1">
+                <a:solidFill>
+                  <a:srgbClr val="000000"/>
+                </a:solidFill>
+                <a:latin typeface="Helvetica Neue"/>
+                <a:ea typeface="Helvetica Neue"/>
+                <a:cs typeface="Helvetica Neue"/>
+              </a:defRPr>
+            </a:pPr>
+            <a:r>
+              <a:rPr sz="1200" b="1">
+                <a:solidFill>
+                  <a:srgbClr val="000000"/>
+                </a:solidFill>
+                <a:latin typeface="Helvetica Neue"/>
+                <a:ea typeface="Helvetica Neue"/>
+                <a:cs typeface="Helvetica Neue"/>
+              </a:rPr>
               <a:t>4</a:t>
             </a:r>
           </a:p>
@@ -11111,16 +12341,28 @@
           <a:lstStyle xmlns:a="http://schemas.openxmlformats.org/drawingml/2006/main"/>
           <a:p xmlns:a="http://schemas.openxmlformats.org/drawingml/2006/main">
             <a:pPr algn="l">
-              <a:defRPr sz="2900">
-                <a:solidFill>
-                  <a:srgbClr val="000000"/>
-                </a:solidFill>
-                <a:latin typeface="Helvetica Neue"/>
-                <a:ea typeface="Helvetica Neue"/>
-                <a:cs typeface="Helvetica Neue"/>
-              </a:defRPr>
-            </a:pPr>
-            <a:r>
+              <a:lnSpc>
+                <a:spcPct val="98000"/>
+              </a:lnSpc>
+              <a:buNone/>
+              <a:defRPr sz="3375" b="1">
+                <a:solidFill>
+                  <a:srgbClr val="000000"/>
+                </a:solidFill>
+                <a:latin typeface="Helvetica Neue"/>
+                <a:ea typeface="Helvetica Neue"/>
+                <a:cs typeface="Helvetica Neue"/>
+              </a:defRPr>
+            </a:pPr>
+            <a:r>
+              <a:rPr sz="3375" b="1">
+                <a:solidFill>
+                  <a:srgbClr val="000000"/>
+                </a:solidFill>
+                <a:latin typeface="Helvetica Neue"/>
+                <a:ea typeface="Helvetica Neue"/>
+                <a:cs typeface="Helvetica Neue"/>
+              </a:rPr>
               <a:t>The harness is everything surrounding the model</a:t>
             </a:r>
           </a:p>
@@ -11154,31 +12396,55 @@
           <a:lstStyle xmlns:a="http://schemas.openxmlformats.org/drawingml/2006/main"/>
           <a:p xmlns:a="http://schemas.openxmlformats.org/drawingml/2006/main">
             <a:pPr algn="l">
-              <a:defRPr sz="2400">
-                <a:solidFill>
-                  <a:srgbClr val="000000"/>
-                </a:solidFill>
-                <a:latin typeface="Helvetica Neue"/>
-                <a:ea typeface="Helvetica Neue"/>
-                <a:cs typeface="Helvetica Neue"/>
-              </a:defRPr>
-            </a:pPr>
-            <a:r>
+              <a:lnSpc>
+                <a:spcPct val="114000"/>
+              </a:lnSpc>
+              <a:buNone/>
+              <a:defRPr sz="1500">
+                <a:solidFill>
+                  <a:srgbClr val="000000"/>
+                </a:solidFill>
+                <a:latin typeface="Helvetica Neue"/>
+                <a:ea typeface="Helvetica Neue"/>
+                <a:cs typeface="Helvetica Neue"/>
+              </a:defRPr>
+            </a:pPr>
+            <a:r>
+              <a:rPr sz="1500">
+                <a:solidFill>
+                  <a:srgbClr val="000000"/>
+                </a:solidFill>
+                <a:latin typeface="Helvetica Neue"/>
+                <a:ea typeface="Helvetica Neue"/>
+                <a:cs typeface="Helvetica Neue"/>
+              </a:rPr>
               <a:t>CONTEXT</a:t>
             </a:r>
           </a:p>
           <a:p xmlns:a="http://schemas.openxmlformats.org/drawingml/2006/main">
             <a:pPr algn="l">
-              <a:defRPr sz="2400">
-                <a:solidFill>
-                  <a:srgbClr val="000000"/>
-                </a:solidFill>
-                <a:latin typeface="Helvetica Neue"/>
-                <a:ea typeface="Helvetica Neue"/>
-                <a:cs typeface="Helvetica Neue"/>
-              </a:defRPr>
-            </a:pPr>
-            <a:r>
+              <a:lnSpc>
+                <a:spcPct val="114000"/>
+              </a:lnSpc>
+              <a:buNone/>
+              <a:defRPr sz="1500">
+                <a:solidFill>
+                  <a:srgbClr val="000000"/>
+                </a:solidFill>
+                <a:latin typeface="Helvetica Neue"/>
+                <a:ea typeface="Helvetica Neue"/>
+                <a:cs typeface="Helvetica Neue"/>
+              </a:defRPr>
+            </a:pPr>
+            <a:r>
+              <a:rPr sz="1500">
+                <a:solidFill>
+                  <a:srgbClr val="000000"/>
+                </a:solidFill>
+                <a:latin typeface="Helvetica Neue"/>
+                <a:ea typeface="Helvetica Neue"/>
+                <a:cs typeface="Helvetica Neue"/>
+              </a:rPr>
               <a:t>Instructions, repository knowledge, memory, and compacted history.</a:t>
             </a:r>
           </a:p>
@@ -11212,31 +12478,55 @@
           <a:lstStyle xmlns:a="http://schemas.openxmlformats.org/drawingml/2006/main"/>
           <a:p xmlns:a="http://schemas.openxmlformats.org/drawingml/2006/main">
             <a:pPr algn="l">
-              <a:defRPr sz="2400">
-                <a:solidFill>
-                  <a:srgbClr val="000000"/>
-                </a:solidFill>
-                <a:latin typeface="Helvetica Neue"/>
-                <a:ea typeface="Helvetica Neue"/>
-                <a:cs typeface="Helvetica Neue"/>
-              </a:defRPr>
-            </a:pPr>
-            <a:r>
+              <a:lnSpc>
+                <a:spcPct val="114000"/>
+              </a:lnSpc>
+              <a:buNone/>
+              <a:defRPr sz="1500">
+                <a:solidFill>
+                  <a:srgbClr val="000000"/>
+                </a:solidFill>
+                <a:latin typeface="Helvetica Neue"/>
+                <a:ea typeface="Helvetica Neue"/>
+                <a:cs typeface="Helvetica Neue"/>
+              </a:defRPr>
+            </a:pPr>
+            <a:r>
+              <a:rPr sz="1500">
+                <a:solidFill>
+                  <a:srgbClr val="000000"/>
+                </a:solidFill>
+                <a:latin typeface="Helvetica Neue"/>
+                <a:ea typeface="Helvetica Neue"/>
+                <a:cs typeface="Helvetica Neue"/>
+              </a:rPr>
               <a:t>ACTION</a:t>
             </a:r>
           </a:p>
           <a:p xmlns:a="http://schemas.openxmlformats.org/drawingml/2006/main">
             <a:pPr algn="l">
-              <a:defRPr sz="2400">
-                <a:solidFill>
-                  <a:srgbClr val="000000"/>
-                </a:solidFill>
-                <a:latin typeface="Helvetica Neue"/>
-                <a:ea typeface="Helvetica Neue"/>
-                <a:cs typeface="Helvetica Neue"/>
-              </a:defRPr>
-            </a:pPr>
-            <a:r>
+              <a:lnSpc>
+                <a:spcPct val="114000"/>
+              </a:lnSpc>
+              <a:buNone/>
+              <a:defRPr sz="1500">
+                <a:solidFill>
+                  <a:srgbClr val="000000"/>
+                </a:solidFill>
+                <a:latin typeface="Helvetica Neue"/>
+                <a:ea typeface="Helvetica Neue"/>
+                <a:cs typeface="Helvetica Neue"/>
+              </a:defRPr>
+            </a:pPr>
+            <a:r>
+              <a:rPr sz="1500">
+                <a:solidFill>
+                  <a:srgbClr val="000000"/>
+                </a:solidFill>
+                <a:latin typeface="Helvetica Neue"/>
+                <a:ea typeface="Helvetica Neue"/>
+                <a:cs typeface="Helvetica Neue"/>
+              </a:rPr>
               <a:t>Tools, permissions, planning, and persistent state.</a:t>
             </a:r>
           </a:p>
@@ -11272,31 +12562,55 @@
           <a:lstStyle xmlns:a="http://schemas.openxmlformats.org/drawingml/2006/main"/>
           <a:p xmlns:a="http://schemas.openxmlformats.org/drawingml/2006/main">
             <a:pPr algn="l">
-              <a:defRPr sz="2400">
-                <a:solidFill>
-                  <a:srgbClr val="000000"/>
-                </a:solidFill>
-                <a:latin typeface="Helvetica Neue"/>
-                <a:ea typeface="Helvetica Neue"/>
-                <a:cs typeface="Helvetica Neue"/>
-              </a:defRPr>
-            </a:pPr>
-            <a:r>
+              <a:lnSpc>
+                <a:spcPct val="114000"/>
+              </a:lnSpc>
+              <a:buNone/>
+              <a:defRPr sz="1500">
+                <a:solidFill>
+                  <a:srgbClr val="000000"/>
+                </a:solidFill>
+                <a:latin typeface="Helvetica Neue"/>
+                <a:ea typeface="Helvetica Neue"/>
+                <a:cs typeface="Helvetica Neue"/>
+              </a:defRPr>
+            </a:pPr>
+            <a:r>
+              <a:rPr sz="1500">
+                <a:solidFill>
+                  <a:srgbClr val="000000"/>
+                </a:solidFill>
+                <a:latin typeface="Helvetica Neue"/>
+                <a:ea typeface="Helvetica Neue"/>
+                <a:cs typeface="Helvetica Neue"/>
+              </a:rPr>
               <a:t>PROOF</a:t>
             </a:r>
           </a:p>
           <a:p xmlns:a="http://schemas.openxmlformats.org/drawingml/2006/main">
             <a:pPr algn="l">
-              <a:defRPr sz="2400">
-                <a:solidFill>
-                  <a:srgbClr val="000000"/>
-                </a:solidFill>
-                <a:latin typeface="Helvetica Neue"/>
-                <a:ea typeface="Helvetica Neue"/>
-                <a:cs typeface="Helvetica Neue"/>
-              </a:defRPr>
-            </a:pPr>
-            <a:r>
+              <a:lnSpc>
+                <a:spcPct val="114000"/>
+              </a:lnSpc>
+              <a:buNone/>
+              <a:defRPr sz="1500">
+                <a:solidFill>
+                  <a:srgbClr val="000000"/>
+                </a:solidFill>
+                <a:latin typeface="Helvetica Neue"/>
+                <a:ea typeface="Helvetica Neue"/>
+                <a:cs typeface="Helvetica Neue"/>
+              </a:defRPr>
+            </a:pPr>
+            <a:r>
+              <a:rPr sz="1500">
+                <a:solidFill>
+                  <a:srgbClr val="000000"/>
+                </a:solidFill>
+                <a:latin typeface="Helvetica Neue"/>
+                <a:ea typeface="Helvetica Neue"/>
+                <a:cs typeface="Helvetica Neue"/>
+              </a:rPr>
               <a:t>Tests, rubrics, review, and acceptance checks.</a:t>
             </a:r>
           </a:p>
@@ -11332,31 +12646,55 @@
           <a:lstStyle xmlns:a="http://schemas.openxmlformats.org/drawingml/2006/main"/>
           <a:p xmlns:a="http://schemas.openxmlformats.org/drawingml/2006/main">
             <a:pPr algn="l">
-              <a:defRPr sz="2400">
-                <a:solidFill>
-                  <a:srgbClr val="000000"/>
-                </a:solidFill>
-                <a:latin typeface="Helvetica Neue"/>
-                <a:ea typeface="Helvetica Neue"/>
-                <a:cs typeface="Helvetica Neue"/>
-              </a:defRPr>
-            </a:pPr>
-            <a:r>
+              <a:lnSpc>
+                <a:spcPct val="114000"/>
+              </a:lnSpc>
+              <a:buNone/>
+              <a:defRPr sz="1500">
+                <a:solidFill>
+                  <a:srgbClr val="000000"/>
+                </a:solidFill>
+                <a:latin typeface="Helvetica Neue"/>
+                <a:ea typeface="Helvetica Neue"/>
+                <a:cs typeface="Helvetica Neue"/>
+              </a:defRPr>
+            </a:pPr>
+            <a:r>
+              <a:rPr sz="1500">
+                <a:solidFill>
+                  <a:srgbClr val="000000"/>
+                </a:solidFill>
+                <a:latin typeface="Helvetica Neue"/>
+                <a:ea typeface="Helvetica Neue"/>
+                <a:cs typeface="Helvetica Neue"/>
+              </a:rPr>
               <a:t>RECOVERY</a:t>
             </a:r>
           </a:p>
           <a:p xmlns:a="http://schemas.openxmlformats.org/drawingml/2006/main">
             <a:pPr algn="l">
-              <a:defRPr sz="2400">
-                <a:solidFill>
-                  <a:srgbClr val="000000"/>
-                </a:solidFill>
-                <a:latin typeface="Helvetica Neue"/>
-                <a:ea typeface="Helvetica Neue"/>
-                <a:cs typeface="Helvetica Neue"/>
-              </a:defRPr>
-            </a:pPr>
-            <a:r>
+              <a:lnSpc>
+                <a:spcPct val="114000"/>
+              </a:lnSpc>
+              <a:buNone/>
+              <a:defRPr sz="1500">
+                <a:solidFill>
+                  <a:srgbClr val="000000"/>
+                </a:solidFill>
+                <a:latin typeface="Helvetica Neue"/>
+                <a:ea typeface="Helvetica Neue"/>
+                <a:cs typeface="Helvetica Neue"/>
+              </a:defRPr>
+            </a:pPr>
+            <a:r>
+              <a:rPr sz="1500">
+                <a:solidFill>
+                  <a:srgbClr val="000000"/>
+                </a:solidFill>
+                <a:latin typeface="Helvetica Neue"/>
+                <a:ea typeface="Helvetica Neue"/>
+                <a:cs typeface="Helvetica Neue"/>
+              </a:rPr>
               <a:t>Retries, escalation, fallbacks, and clear handoffs.</a:t>
             </a:r>
           </a:p>
@@ -11414,6 +12752,7 @@
           <a:lstStyle xmlns:a="http://schemas.openxmlformats.org/drawingml/2006/main"/>
           <a:p xmlns:a="http://schemas.openxmlformats.org/drawingml/2006/main">
             <a:pPr algn="r">
+              <a:buNone/>
               <a:defRPr sz="1000">
                 <a:solidFill>
                   <a:srgbClr val="000000"/>
@@ -11459,6 +12798,7 @@
           <a:lstStyle xmlns:a="http://schemas.openxmlformats.org/drawingml/2006/main"/>
           <a:p xmlns:a="http://schemas.openxmlformats.org/drawingml/2006/main">
             <a:pPr algn="l">
+              <a:buNone/>
               <a:defRPr sz="2900">
                 <a:solidFill>
                   <a:srgbClr val="000000"/>
@@ -11504,6 +12844,7 @@
           <a:lstStyle xmlns:a="http://schemas.openxmlformats.org/drawingml/2006/main"/>
           <a:p xmlns:a="http://schemas.openxmlformats.org/drawingml/2006/main">
             <a:pPr algn="l">
+              <a:buNone/>
               <a:defRPr sz="2400">
                 <a:solidFill>
                   <a:srgbClr val="000000"/>
@@ -11519,6 +12860,7 @@
           </a:p>
           <a:p xmlns:a="http://schemas.openxmlformats.org/drawingml/2006/main">
             <a:pPr algn="l">
+              <a:buNone/>
               <a:defRPr sz="2400">
                 <a:solidFill>
                   <a:srgbClr val="000000"/>
@@ -11564,6 +12906,7 @@
           <a:lstStyle xmlns:a="http://schemas.openxmlformats.org/drawingml/2006/main"/>
           <a:p xmlns:a="http://schemas.openxmlformats.org/drawingml/2006/main">
             <a:pPr algn="l">
+              <a:buNone/>
               <a:defRPr sz="2400">
                 <a:solidFill>
                   <a:srgbClr val="000000"/>
@@ -11579,6 +12922,7 @@
           </a:p>
           <a:p xmlns:a="http://schemas.openxmlformats.org/drawingml/2006/main">
             <a:pPr algn="l">
+              <a:buNone/>
               <a:defRPr sz="2400">
                 <a:solidFill>
                   <a:srgbClr val="000000"/>
@@ -11624,6 +12968,7 @@
           <a:lstStyle xmlns:a="http://schemas.openxmlformats.org/drawingml/2006/main"/>
           <a:p xmlns:a="http://schemas.openxmlformats.org/drawingml/2006/main">
             <a:pPr algn="l">
+              <a:buNone/>
               <a:defRPr sz="2400">
                 <a:solidFill>
                   <a:srgbClr val="000000"/>
@@ -11639,6 +12984,7 @@
           </a:p>
           <a:p xmlns:a="http://schemas.openxmlformats.org/drawingml/2006/main">
             <a:pPr algn="l">
+              <a:buNone/>
               <a:defRPr sz="2400">
                 <a:solidFill>
                   <a:srgbClr val="000000"/>
